--- a/project_50_handwritten_document_recognition/presentations/project_presentation.pptx
+++ b/project_50_handwritten_document_recognition/presentations/project_presentation.pptx
@@ -13,6 +13,13 @@
     <p:sldId id="261" r:id="rId12"/>
     <p:sldId id="262" r:id="rId13"/>
     <p:sldId id="263" r:id="rId14"/>
+    <p:sldId id="264" r:id="rId15"/>
+    <p:sldId id="265" r:id="rId16"/>
+    <p:sldId id="266" r:id="rId17"/>
+    <p:sldId id="267" r:id="rId18"/>
+    <p:sldId id="268" r:id="rId19"/>
+    <p:sldId id="269" r:id="rId20"/>
+    <p:sldId id="270" r:id="rId21"/>
   </p:sldIdLst>
   <p:sldSz cx="12191695" cy="6858000" type="screen4x3"/>
   <p:notesSz cx="6858000" cy="9144000"/>
@@ -3097,23 +3104,174 @@
       <p:grpSpPr/>
       <p:sp>
         <p:nvSpPr>
-          <p:cNvPr id="2" name="Rectangle 1"/>
+          <p:cNvPr id="2" name="TextBox 1"/>
+          <p:cNvSpPr txBox="1"/>
+          <p:nvPr/>
+        </p:nvSpPr>
+        <p:spPr>
+          <a:xfrm>
+            <a:off x="914400" y="1645920"/>
+            <a:ext cx="10362895" cy="3474720"/>
+          </a:xfrm>
+          <a:prstGeom prst="rect">
+            <a:avLst/>
+          </a:prstGeom>
+          <a:noFill/>
+        </p:spPr>
+        <p:txBody>
+          <a:bodyPr wrap="square">
+            <a:spAutoFit/>
+          </a:bodyPr>
+          <a:lstStyle/>
+          <a:p>
+            <a:r>
+              <a:rPr b="1" sz="1200">
+                <a:solidFill>
+                  <a:srgbClr val="4F46E5"/>
+                </a:solidFill>
+              </a:rPr>
+              <a:t>ENGINEERING CAPSTONE PORTFOLIO • PROJECT-050</a:t>
+            </a:r>
+          </a:p>
+          <a:p>
+            <a:pPr>
+              <a:spcBef>
+                <a:spcPts val="1000"/>
+              </a:spcBef>
+            </a:pPr>
+            <a:r>
+              <a:rPr b="1" sz="3200">
+                <a:solidFill>
+                  <a:srgbClr val="0F172A"/>
+                </a:solidFill>
+              </a:rPr>
+              <a:t>Handwritten Document Recognition &amp;
+Information Extraction Platform</a:t>
+            </a:r>
+          </a:p>
+          <a:p>
+            <a:pPr>
+              <a:spcBef>
+                <a:spcPts val="1200"/>
+              </a:spcBef>
+            </a:pPr>
+            <a:r>
+              <a:rPr sz="1400">
+                <a:solidFill>
+                  <a:srgbClr val="64748B"/>
+                </a:solidFill>
+              </a:rPr>
+              <a:t>Dual PyTorch Engines (CRNN-CTC &amp; Quality Scorer Net), 6,000 Document Telemetry Records, SQLite WAL, SHA-256 Audit Ledger &amp; Port 5050 Microservice</a:t>
+            </a:r>
+          </a:p>
+        </p:txBody>
+      </p:sp>
+    </p:spTree>
+  </p:cSld>
+  <p:clrMapOvr>
+    <a:masterClrMapping/>
+  </p:clrMapOvr>
+</p:sld>
+</file>
+
+<file path=ppt/slides/slide10.xml><?xml version="1.0" encoding="utf-8"?>
+<p:sld xmlns:a="http://schemas.openxmlformats.org/drawingml/2006/main" xmlns:p="http://schemas.openxmlformats.org/presentationml/2006/main" xmlns:r="http://schemas.openxmlformats.org/officeDocument/2006/relationships">
+  <p:cSld>
+    <p:spTree>
+      <p:nvGrpSpPr>
+        <p:cNvPr id="1" name=""/>
+        <p:cNvGrpSpPr/>
+        <p:nvPr/>
+      </p:nvGrpSpPr>
+      <p:grpSpPr/>
+      <p:sp>
+        <p:nvSpPr>
+          <p:cNvPr id="2" name="TextBox 1"/>
+          <p:cNvSpPr txBox="1"/>
+          <p:nvPr/>
+        </p:nvSpPr>
+        <p:spPr>
+          <a:xfrm>
+            <a:off x="731520" y="365760"/>
+            <a:ext cx="10728655" cy="822960"/>
+          </a:xfrm>
+          <a:prstGeom prst="rect">
+            <a:avLst/>
+          </a:prstGeom>
+          <a:noFill/>
+        </p:spPr>
+        <p:txBody>
+          <a:bodyPr wrap="square" lIns="0" tIns="0" rIns="0" bIns="0">
+            <a:spAutoFit/>
+          </a:bodyPr>
+          <a:lstStyle/>
+          <a:p>
+            <a:r>
+              <a:rPr b="1" sz="1000">
+                <a:solidFill>
+                  <a:srgbClr val="4F46E5"/>
+                </a:solidFill>
+              </a:rPr>
+              <a:t>CASE STUDY 1 • PROJECT-050</a:t>
+            </a:r>
+          </a:p>
+          <a:p>
+            <a:r>
+              <a:rPr b="1" sz="2000">
+                <a:solidFill>
+                  <a:srgbClr val="0F172A"/>
+                </a:solidFill>
+              </a:rPr>
+              <a:t>Clinical Intake Verification: Dr. Jonathan Hayes</a:t>
+            </a:r>
+          </a:p>
+        </p:txBody>
+      </p:sp>
+      <p:pic>
+        <p:nvPicPr>
+          <p:cNvPr id="3" name="Picture 2" descr="04_dr_hayes_clinical_intake_scan.png"/>
+          <p:cNvPicPr>
+            <a:picLocks noChangeAspect="1"/>
+          </p:cNvPicPr>
+          <p:nvPr/>
+        </p:nvPicPr>
+        <p:blipFill>
+          <a:blip r:embed="rId2"/>
+          <a:stretch>
+            <a:fillRect/>
+          </a:stretch>
+        </p:blipFill>
+        <p:spPr>
+          <a:xfrm>
+            <a:off x="731520" y="1371600"/>
+            <a:ext cx="6858000" cy="4846320"/>
+          </a:xfrm>
+          <a:prstGeom prst="rect">
+            <a:avLst/>
+          </a:prstGeom>
+        </p:spPr>
+      </p:pic>
+      <p:sp>
+        <p:nvSpPr>
+          <p:cNvPr id="4" name="Rectangle 3"/>
           <p:cNvSpPr/>
           <p:nvPr/>
         </p:nvSpPr>
         <p:spPr>
           <a:xfrm>
-            <a:off x="0" y="0"/>
-            <a:ext cx="12191695" cy="6858000"/>
+            <a:off x="7863840" y="1371600"/>
+            <a:ext cx="3566160" cy="4846320"/>
           </a:xfrm>
           <a:prstGeom prst="rect">
             <a:avLst/>
           </a:prstGeom>
           <a:solidFill>
-            <a:srgbClr val="0F172A"/>
+            <a:srgbClr val="FFFFFF"/>
           </a:solidFill>
-          <a:ln>
-            <a:noFill/>
+          <a:ln w="12700">
+            <a:solidFill>
+              <a:srgbClr val="E2E8F0"/>
+            </a:solidFill>
           </a:ln>
         </p:spPr>
         <p:style>
@@ -3140,14 +3298,14 @@
       </p:sp>
       <p:sp>
         <p:nvSpPr>
-          <p:cNvPr id="3" name="TextBox 2"/>
+          <p:cNvPr id="5" name="TextBox 4"/>
           <p:cNvSpPr txBox="1"/>
           <p:nvPr/>
         </p:nvSpPr>
         <p:spPr>
           <a:xfrm>
-            <a:off x="1097280" y="1645920"/>
-            <a:ext cx="10058400" cy="3474720"/>
+            <a:off x="8046720" y="1554480"/>
+            <a:ext cx="3200400" cy="4480560"/>
           </a:xfrm>
           <a:prstGeom prst="rect">
             <a:avLst/>
@@ -3155,50 +3313,1739 @@
           <a:noFill/>
         </p:spPr>
         <p:txBody>
-          <a:bodyPr wrap="square">
+          <a:bodyPr wrap="square" lIns="0" tIns="0" rIns="0" bIns="0">
             <a:spAutoFit/>
           </a:bodyPr>
           <a:lstStyle/>
           <a:p>
-            <a:pPr>
-              <a:defRPr sz="1400" b="1">
-                <a:solidFill>
-                  <a:srgbClr val="38BDF8"/>
-                </a:solidFill>
-              </a:defRPr>
-            </a:pPr>
-            <a:r>
-              <a:t>PROJECT 50 OF 55  •  RESEARCH &amp; IMPLEMENTATION DECK</a:t>
-            </a:r>
-          </a:p>
-          <a:p>
-            <a:pPr>
-              <a:spcBef>
-                <a:spcPts val="1400"/>
-              </a:spcBef>
-              <a:defRPr sz="3200" b="1">
-                <a:solidFill>
-                  <a:srgbClr val="FFFFFF"/>
-                </a:solidFill>
-              </a:defRPr>
-            </a:pPr>
-            <a:r>
-              <a:t>AI-Based Handwritten Document Recognition and Information Extraction Using Deep Learning</a:t>
-            </a:r>
-          </a:p>
-          <a:p>
-            <a:pPr>
-              <a:spcBef>
-                <a:spcPts val="1200"/>
-              </a:spcBef>
-              <a:defRPr sz="1600">
-                <a:solidFill>
-                  <a:srgbClr val="CBD5E1"/>
-                </a:solidFill>
-              </a:defRPr>
-            </a:pPr>
-            <a:r>
-              <a:t>Enterprise-Grade AI Architecture, Machine Learning Pipeline &amp; Deployment Framework</a:t>
+            <a:r>
+              <a:rPr b="1" sz="1300">
+                <a:solidFill>
+                  <a:srgbClr val="4F46E5"/>
+                </a:solidFill>
+              </a:rPr>
+              <a:t>Clean Auto-Approval</a:t>
+            </a:r>
+          </a:p>
+          <a:p>
+            <a:pPr>
+              <a:spcBef>
+                <a:spcPts val="400"/>
+              </a:spcBef>
+            </a:pPr>
+            <a:r>
+              <a:rPr sz="1000">
+                <a:solidFill>
+                  <a:srgbClr val="1E293B"/>
+                </a:solidFill>
+              </a:rPr>
+              <a:t>• Hospital Clinical Intake Form template evaluated.</a:t>
+            </a:r>
+          </a:p>
+          <a:p>
+            <a:pPr>
+              <a:spcBef>
+                <a:spcPts val="400"/>
+              </a:spcBef>
+            </a:pPr>
+            <a:r>
+              <a:rPr sz="1000">
+                <a:solidFill>
+                  <a:srgbClr val="1E293B"/>
+                </a:solidFill>
+              </a:rPr>
+              <a:t>• Extracted Name: Dr. Jonathan Hayes (96.2% lexical confidence).</a:t>
+            </a:r>
+          </a:p>
+          <a:p>
+            <a:pPr>
+              <a:spcBef>
+                <a:spcPts val="400"/>
+              </a:spcBef>
+            </a:pPr>
+            <a:r>
+              <a:rPr sz="1000">
+                <a:solidFill>
+                  <a:srgbClr val="1E293B"/>
+                </a:solidFill>
+              </a:rPr>
+              <a:t>• Document Quality Score: 88.5 / 100.</a:t>
+            </a:r>
+          </a:p>
+          <a:p>
+            <a:pPr>
+              <a:spcBef>
+                <a:spcPts val="400"/>
+              </a:spcBef>
+            </a:pPr>
+            <a:r>
+              <a:rPr sz="1000">
+                <a:solidFill>
+                  <a:srgbClr val="1E293B"/>
+                </a:solidFill>
+              </a:rPr>
+              <a:t>• Signature Verified: VALID (score: 83.9).</a:t>
+            </a:r>
+          </a:p>
+          <a:p>
+            <a:pPr>
+              <a:spcBef>
+                <a:spcPts val="400"/>
+              </a:spcBef>
+            </a:pPr>
+            <a:r>
+              <a:rPr sz="1000">
+                <a:solidFill>
+                  <a:srgbClr val="1E293B"/>
+                </a:solidFill>
+              </a:rPr>
+              <a:t>• Status: Auto-Approved with Zero Human Review Required.</a:t>
+            </a:r>
+          </a:p>
+          <a:p>
+            <a:pPr>
+              <a:spcBef>
+                <a:spcPts val="400"/>
+              </a:spcBef>
+            </a:pPr>
+            <a:r>
+              <a:rPr sz="1000">
+                <a:solidFill>
+                  <a:srgbClr val="1E293B"/>
+                </a:solidFill>
+              </a:rPr>
+              <a:t>• Deterministic SHA-256 Evidence Hash generated.</a:t>
+            </a:r>
+          </a:p>
+        </p:txBody>
+      </p:sp>
+    </p:spTree>
+  </p:cSld>
+  <p:clrMapOvr>
+    <a:masterClrMapping/>
+  </p:clrMapOvr>
+</p:sld>
+</file>
+
+<file path=ppt/slides/slide11.xml><?xml version="1.0" encoding="utf-8"?>
+<p:sld xmlns:a="http://schemas.openxmlformats.org/drawingml/2006/main" xmlns:p="http://schemas.openxmlformats.org/presentationml/2006/main" xmlns:r="http://schemas.openxmlformats.org/officeDocument/2006/relationships">
+  <p:cSld>
+    <p:spTree>
+      <p:nvGrpSpPr>
+        <p:cNvPr id="1" name=""/>
+        <p:cNvGrpSpPr/>
+        <p:nvPr/>
+      </p:nvGrpSpPr>
+      <p:grpSpPr/>
+      <p:sp>
+        <p:nvSpPr>
+          <p:cNvPr id="2" name="TextBox 1"/>
+          <p:cNvSpPr txBox="1"/>
+          <p:nvPr/>
+        </p:nvSpPr>
+        <p:spPr>
+          <a:xfrm>
+            <a:off x="731520" y="365760"/>
+            <a:ext cx="10728655" cy="822960"/>
+          </a:xfrm>
+          <a:prstGeom prst="rect">
+            <a:avLst/>
+          </a:prstGeom>
+          <a:noFill/>
+        </p:spPr>
+        <p:txBody>
+          <a:bodyPr wrap="square" lIns="0" tIns="0" rIns="0" bIns="0">
+            <a:spAutoFit/>
+          </a:bodyPr>
+          <a:lstStyle/>
+          <a:p>
+            <a:r>
+              <a:rPr b="1" sz="1000">
+                <a:solidFill>
+                  <a:srgbClr val="4F46E5"/>
+                </a:solidFill>
+              </a:rPr>
+              <a:t>CASE STUDY 2 &amp; 3 • PROJECT-050</a:t>
+            </a:r>
+          </a:p>
+          <a:p>
+            <a:r>
+              <a:rPr b="1" sz="2000">
+                <a:solidFill>
+                  <a:srgbClr val="0F172A"/>
+                </a:solidFill>
+              </a:rPr>
+              <a:t>Commercial KYC &amp; Cursive Degradation Escalation</a:t>
+            </a:r>
+          </a:p>
+        </p:txBody>
+      </p:sp>
+      <p:pic>
+        <p:nvPicPr>
+          <p:cNvPr id="3" name="Picture 2" descr="06_anonymous_survey_cursive_escalation.png"/>
+          <p:cNvPicPr>
+            <a:picLocks noChangeAspect="1"/>
+          </p:cNvPicPr>
+          <p:nvPr/>
+        </p:nvPicPr>
+        <p:blipFill>
+          <a:blip r:embed="rId2"/>
+          <a:stretch>
+            <a:fillRect/>
+          </a:stretch>
+        </p:blipFill>
+        <p:spPr>
+          <a:xfrm>
+            <a:off x="731520" y="1371600"/>
+            <a:ext cx="6858000" cy="4846320"/>
+          </a:xfrm>
+          <a:prstGeom prst="rect">
+            <a:avLst/>
+          </a:prstGeom>
+        </p:spPr>
+      </p:pic>
+      <p:sp>
+        <p:nvSpPr>
+          <p:cNvPr id="4" name="Rectangle 3"/>
+          <p:cNvSpPr/>
+          <p:nvPr/>
+        </p:nvSpPr>
+        <p:spPr>
+          <a:xfrm>
+            <a:off x="7863840" y="1371600"/>
+            <a:ext cx="3566160" cy="4846320"/>
+          </a:xfrm>
+          <a:prstGeom prst="rect">
+            <a:avLst/>
+          </a:prstGeom>
+          <a:solidFill>
+            <a:srgbClr val="FFFFFF"/>
+          </a:solidFill>
+          <a:ln w="12700">
+            <a:solidFill>
+              <a:srgbClr val="E2E8F0"/>
+            </a:solidFill>
+          </a:ln>
+        </p:spPr>
+        <p:style>
+          <a:lnRef idx="1">
+            <a:schemeClr val="accent1"/>
+          </a:lnRef>
+          <a:fillRef idx="3">
+            <a:schemeClr val="accent1"/>
+          </a:fillRef>
+          <a:effectRef idx="2">
+            <a:schemeClr val="accent1"/>
+          </a:effectRef>
+          <a:fontRef idx="minor">
+            <a:schemeClr val="lt1"/>
+          </a:fontRef>
+        </p:style>
+        <p:txBody>
+          <a:bodyPr rtlCol="0" anchor="ctr"/>
+          <a:lstStyle/>
+          <a:p>
+            <a:pPr algn="ctr"/>
+          </a:p>
+        </p:txBody>
+      </p:sp>
+      <p:sp>
+        <p:nvSpPr>
+          <p:cNvPr id="5" name="TextBox 4"/>
+          <p:cNvSpPr txBox="1"/>
+          <p:nvPr/>
+        </p:nvSpPr>
+        <p:spPr>
+          <a:xfrm>
+            <a:off x="8046720" y="1554480"/>
+            <a:ext cx="3200400" cy="4480560"/>
+          </a:xfrm>
+          <a:prstGeom prst="rect">
+            <a:avLst/>
+          </a:prstGeom>
+          <a:noFill/>
+        </p:spPr>
+        <p:txBody>
+          <a:bodyPr wrap="square" lIns="0" tIns="0" rIns="0" bIns="0">
+            <a:spAutoFit/>
+          </a:bodyPr>
+          <a:lstStyle/>
+          <a:p>
+            <a:r>
+              <a:rPr b="1" sz="1300">
+                <a:solidFill>
+                  <a:srgbClr val="4F46E5"/>
+                </a:solidFill>
+              </a:rPr>
+              <a:t>Human Review Gating</a:t>
+            </a:r>
+          </a:p>
+          <a:p>
+            <a:pPr>
+              <a:spcBef>
+                <a:spcPts val="400"/>
+              </a:spcBef>
+            </a:pPr>
+            <a:r>
+              <a:rPr sz="1000">
+                <a:solidFill>
+                  <a:srgbClr val="1E293B"/>
+                </a:solidFill>
+              </a:rPr>
+              <a:t>• Global Supplies Ltd invoice evaluated with commercial cursive.</a:t>
+            </a:r>
+          </a:p>
+          <a:p>
+            <a:pPr>
+              <a:spcBef>
+                <a:spcPts val="400"/>
+              </a:spcBef>
+            </a:pPr>
+            <a:r>
+              <a:rPr sz="1000">
+                <a:solidFill>
+                  <a:srgbClr val="1E293B"/>
+                </a:solidFill>
+              </a:rPr>
+              <a:t>• Anonymous Respondent #42 survey with heavy cursive slant.</a:t>
+            </a:r>
+          </a:p>
+          <a:p>
+            <a:pPr>
+              <a:spcBef>
+                <a:spcPts val="400"/>
+              </a:spcBef>
+            </a:pPr>
+            <a:r>
+              <a:rPr sz="1000">
+                <a:solidFill>
+                  <a:srgbClr val="1E293B"/>
+                </a:solidFill>
+              </a:rPr>
+              <a:t>• Quality Score drops to 34.1 / 100 with 19% occlusion.</a:t>
+            </a:r>
+          </a:p>
+          <a:p>
+            <a:pPr>
+              <a:spcBef>
+                <a:spcPts val="400"/>
+              </a:spcBef>
+            </a:pPr>
+            <a:r>
+              <a:rPr sz="1000">
+                <a:solidFill>
+                  <a:srgbClr val="1E293B"/>
+                </a:solidFill>
+              </a:rPr>
+              <a:t>• Review risk probability spikes to 99.9%.</a:t>
+            </a:r>
+          </a:p>
+          <a:p>
+            <a:pPr>
+              <a:spcBef>
+                <a:spcPts val="400"/>
+              </a:spcBef>
+            </a:pPr>
+            <a:r>
+              <a:rPr sz="1000">
+                <a:solidFill>
+                  <a:srgbClr val="1E293B"/>
+                </a:solidFill>
+              </a:rPr>
+              <a:t>• Escalated to Human Review queue automatically.</a:t>
+            </a:r>
+          </a:p>
+          <a:p>
+            <a:pPr>
+              <a:spcBef>
+                <a:spcPts val="400"/>
+              </a:spcBef>
+            </a:pPr>
+            <a:r>
+              <a:rPr sz="1000">
+                <a:solidFill>
+                  <a:srgbClr val="1E293B"/>
+                </a:solidFill>
+              </a:rPr>
+              <a:t>• Prevents erroneous data injection into production EHR/ERP systems.</a:t>
+            </a:r>
+          </a:p>
+        </p:txBody>
+      </p:sp>
+    </p:spTree>
+  </p:cSld>
+  <p:clrMapOvr>
+    <a:masterClrMapping/>
+  </p:clrMapOvr>
+</p:sld>
+</file>
+
+<file path=ppt/slides/slide12.xml><?xml version="1.0" encoding="utf-8"?>
+<p:sld xmlns:a="http://schemas.openxmlformats.org/drawingml/2006/main" xmlns:p="http://schemas.openxmlformats.org/presentationml/2006/main" xmlns:r="http://schemas.openxmlformats.org/officeDocument/2006/relationships">
+  <p:cSld>
+    <p:spTree>
+      <p:nvGrpSpPr>
+        <p:cNvPr id="1" name=""/>
+        <p:cNvGrpSpPr/>
+        <p:nvPr/>
+      </p:nvGrpSpPr>
+      <p:grpSpPr/>
+      <p:sp>
+        <p:nvSpPr>
+          <p:cNvPr id="2" name="TextBox 1"/>
+          <p:cNvSpPr txBox="1"/>
+          <p:nvPr/>
+        </p:nvSpPr>
+        <p:spPr>
+          <a:xfrm>
+            <a:off x="731520" y="365760"/>
+            <a:ext cx="10728655" cy="822960"/>
+          </a:xfrm>
+          <a:prstGeom prst="rect">
+            <a:avLst/>
+          </a:prstGeom>
+          <a:noFill/>
+        </p:spPr>
+        <p:txBody>
+          <a:bodyPr wrap="square" lIns="0" tIns="0" rIns="0" bIns="0">
+            <a:spAutoFit/>
+          </a:bodyPr>
+          <a:lstStyle/>
+          <a:p>
+            <a:r>
+              <a:rPr b="1" sz="1000">
+                <a:solidFill>
+                  <a:srgbClr val="4F46E5"/>
+                </a:solidFill>
+              </a:rPr>
+              <a:t>DATABASE ARCHITECTURE • PROJECT-050</a:t>
+            </a:r>
+          </a:p>
+          <a:p>
+            <a:r>
+              <a:rPr b="1" sz="2000">
+                <a:solidFill>
+                  <a:srgbClr val="0F172A"/>
+                </a:solidFill>
+              </a:rPr>
+              <a:t>Parsed Document Registry: Relational SQLite WAL Persistence</a:t>
+            </a:r>
+          </a:p>
+        </p:txBody>
+      </p:sp>
+      <p:pic>
+        <p:nvPicPr>
+          <p:cNvPr id="3" name="Picture 2" descr="07_parsed_document_registry.png"/>
+          <p:cNvPicPr>
+            <a:picLocks noChangeAspect="1"/>
+          </p:cNvPicPr>
+          <p:nvPr/>
+        </p:nvPicPr>
+        <p:blipFill>
+          <a:blip r:embed="rId2"/>
+          <a:stretch>
+            <a:fillRect/>
+          </a:stretch>
+        </p:blipFill>
+        <p:spPr>
+          <a:xfrm>
+            <a:off x="731520" y="1371600"/>
+            <a:ext cx="6858000" cy="4846320"/>
+          </a:xfrm>
+          <a:prstGeom prst="rect">
+            <a:avLst/>
+          </a:prstGeom>
+        </p:spPr>
+      </p:pic>
+      <p:sp>
+        <p:nvSpPr>
+          <p:cNvPr id="4" name="Rectangle 3"/>
+          <p:cNvSpPr/>
+          <p:nvPr/>
+        </p:nvSpPr>
+        <p:spPr>
+          <a:xfrm>
+            <a:off x="7863840" y="1371600"/>
+            <a:ext cx="3566160" cy="4846320"/>
+          </a:xfrm>
+          <a:prstGeom prst="rect">
+            <a:avLst/>
+          </a:prstGeom>
+          <a:solidFill>
+            <a:srgbClr val="FFFFFF"/>
+          </a:solidFill>
+          <a:ln w="12700">
+            <a:solidFill>
+              <a:srgbClr val="E2E8F0"/>
+            </a:solidFill>
+          </a:ln>
+        </p:spPr>
+        <p:style>
+          <a:lnRef idx="1">
+            <a:schemeClr val="accent1"/>
+          </a:lnRef>
+          <a:fillRef idx="3">
+            <a:schemeClr val="accent1"/>
+          </a:fillRef>
+          <a:effectRef idx="2">
+            <a:schemeClr val="accent1"/>
+          </a:effectRef>
+          <a:fontRef idx="minor">
+            <a:schemeClr val="lt1"/>
+          </a:fontRef>
+        </p:style>
+        <p:txBody>
+          <a:bodyPr rtlCol="0" anchor="ctr"/>
+          <a:lstStyle/>
+          <a:p>
+            <a:pPr algn="ctr"/>
+          </a:p>
+        </p:txBody>
+      </p:sp>
+      <p:sp>
+        <p:nvSpPr>
+          <p:cNvPr id="5" name="TextBox 4"/>
+          <p:cNvSpPr txBox="1"/>
+          <p:nvPr/>
+        </p:nvSpPr>
+        <p:spPr>
+          <a:xfrm>
+            <a:off x="8046720" y="1554480"/>
+            <a:ext cx="3200400" cy="4480560"/>
+          </a:xfrm>
+          <a:prstGeom prst="rect">
+            <a:avLst/>
+          </a:prstGeom>
+          <a:noFill/>
+        </p:spPr>
+        <p:txBody>
+          <a:bodyPr wrap="square" lIns="0" tIns="0" rIns="0" bIns="0">
+            <a:spAutoFit/>
+          </a:bodyPr>
+          <a:lstStyle/>
+          <a:p>
+            <a:r>
+              <a:rPr b="1" sz="1300">
+                <a:solidFill>
+                  <a:srgbClr val="4F46E5"/>
+                </a:solidFill>
+              </a:rPr>
+              <a:t>ACID Ledger Storage</a:t>
+            </a:r>
+          </a:p>
+          <a:p>
+            <a:pPr>
+              <a:spcBef>
+                <a:spcPts val="400"/>
+              </a:spcBef>
+            </a:pPr>
+            <a:r>
+              <a:rPr sz="1000">
+                <a:solidFill>
+                  <a:srgbClr val="1E293B"/>
+                </a:solidFill>
+              </a:rPr>
+              <a:t>• Relational SQLite database running in Write-Ahead Logging (WAL) mode.</a:t>
+            </a:r>
+          </a:p>
+          <a:p>
+            <a:pPr>
+              <a:spcBef>
+                <a:spcPts val="400"/>
+              </a:spcBef>
+            </a:pPr>
+            <a:r>
+              <a:rPr sz="1000">
+                <a:solidFill>
+                  <a:srgbClr val="1E293B"/>
+                </a:solidFill>
+              </a:rPr>
+              <a:t>• Indexed lookup on doc_id, document_type, and timestamp.</a:t>
+            </a:r>
+          </a:p>
+          <a:p>
+            <a:pPr>
+              <a:spcBef>
+                <a:spcPts val="400"/>
+              </a:spcBef>
+            </a:pPr>
+            <a:r>
+              <a:rPr sz="1000">
+                <a:solidFill>
+                  <a:srgbClr val="1E293B"/>
+                </a:solidFill>
+              </a:rPr>
+              <a:t>• Stores full telemetry, error rates, and extracted JSON payloads.</a:t>
+            </a:r>
+          </a:p>
+          <a:p>
+            <a:pPr>
+              <a:spcBef>
+                <a:spcPts val="400"/>
+              </a:spcBef>
+            </a:pPr>
+            <a:r>
+              <a:rPr sz="1000">
+                <a:solidFill>
+                  <a:srgbClr val="1E293B"/>
+                </a:solidFill>
+              </a:rPr>
+              <a:t>• Clean Pass vs. Review Required status badges.</a:t>
+            </a:r>
+          </a:p>
+          <a:p>
+            <a:pPr>
+              <a:spcBef>
+                <a:spcPts val="400"/>
+              </a:spcBef>
+            </a:pPr>
+            <a:r>
+              <a:rPr sz="1000">
+                <a:solidFill>
+                  <a:srgbClr val="1E293B"/>
+                </a:solidFill>
+              </a:rPr>
+              <a:t>• Zero locking bottlenecks under concurrent ingestion.</a:t>
+            </a:r>
+          </a:p>
+        </p:txBody>
+      </p:sp>
+    </p:spTree>
+  </p:cSld>
+  <p:clrMapOvr>
+    <a:masterClrMapping/>
+  </p:clrMapOvr>
+</p:sld>
+</file>
+
+<file path=ppt/slides/slide13.xml><?xml version="1.0" encoding="utf-8"?>
+<p:sld xmlns:a="http://schemas.openxmlformats.org/drawingml/2006/main" xmlns:p="http://schemas.openxmlformats.org/presentationml/2006/main" xmlns:r="http://schemas.openxmlformats.org/officeDocument/2006/relationships">
+  <p:cSld>
+    <p:spTree>
+      <p:nvGrpSpPr>
+        <p:cNvPr id="1" name=""/>
+        <p:cNvGrpSpPr/>
+        <p:nvPr/>
+      </p:nvGrpSpPr>
+      <p:grpSpPr/>
+      <p:sp>
+        <p:nvSpPr>
+          <p:cNvPr id="2" name="TextBox 1"/>
+          <p:cNvSpPr txBox="1"/>
+          <p:nvPr/>
+        </p:nvSpPr>
+        <p:spPr>
+          <a:xfrm>
+            <a:off x="731520" y="365760"/>
+            <a:ext cx="10728655" cy="822960"/>
+          </a:xfrm>
+          <a:prstGeom prst="rect">
+            <a:avLst/>
+          </a:prstGeom>
+          <a:noFill/>
+        </p:spPr>
+        <p:txBody>
+          <a:bodyPr wrap="square" lIns="0" tIns="0" rIns="0" bIns="0">
+            <a:spAutoFit/>
+          </a:bodyPr>
+          <a:lstStyle/>
+          <a:p>
+            <a:r>
+              <a:rPr b="1" sz="1000">
+                <a:solidFill>
+                  <a:srgbClr val="4F46E5"/>
+                </a:solidFill>
+              </a:rPr>
+              <a:t>SECURITY &amp; AUDIT • PROJECT-050</a:t>
+            </a:r>
+          </a:p>
+          <a:p>
+            <a:r>
+              <a:rPr b="1" sz="2000">
+                <a:solidFill>
+                  <a:srgbClr val="0F172A"/>
+                </a:solidFill>
+              </a:rPr>
+              <a:t>Cryptographic Audit Ledger: SHA-256 Hash Chaining</a:t>
+            </a:r>
+          </a:p>
+        </p:txBody>
+      </p:sp>
+      <p:pic>
+        <p:nvPicPr>
+          <p:cNvPr id="3" name="Picture 2" descr="08_cryptographic_audit_ledger.png"/>
+          <p:cNvPicPr>
+            <a:picLocks noChangeAspect="1"/>
+          </p:cNvPicPr>
+          <p:nvPr/>
+        </p:nvPicPr>
+        <p:blipFill>
+          <a:blip r:embed="rId2"/>
+          <a:stretch>
+            <a:fillRect/>
+          </a:stretch>
+        </p:blipFill>
+        <p:spPr>
+          <a:xfrm>
+            <a:off x="731520" y="1371600"/>
+            <a:ext cx="6858000" cy="4846320"/>
+          </a:xfrm>
+          <a:prstGeom prst="rect">
+            <a:avLst/>
+          </a:prstGeom>
+        </p:spPr>
+      </p:pic>
+      <p:sp>
+        <p:nvSpPr>
+          <p:cNvPr id="4" name="Rectangle 3"/>
+          <p:cNvSpPr/>
+          <p:nvPr/>
+        </p:nvSpPr>
+        <p:spPr>
+          <a:xfrm>
+            <a:off x="7863840" y="1371600"/>
+            <a:ext cx="3566160" cy="4846320"/>
+          </a:xfrm>
+          <a:prstGeom prst="rect">
+            <a:avLst/>
+          </a:prstGeom>
+          <a:solidFill>
+            <a:srgbClr val="FFFFFF"/>
+          </a:solidFill>
+          <a:ln w="12700">
+            <a:solidFill>
+              <a:srgbClr val="E2E8F0"/>
+            </a:solidFill>
+          </a:ln>
+        </p:spPr>
+        <p:style>
+          <a:lnRef idx="1">
+            <a:schemeClr val="accent1"/>
+          </a:lnRef>
+          <a:fillRef idx="3">
+            <a:schemeClr val="accent1"/>
+          </a:fillRef>
+          <a:effectRef idx="2">
+            <a:schemeClr val="accent1"/>
+          </a:effectRef>
+          <a:fontRef idx="minor">
+            <a:schemeClr val="lt1"/>
+          </a:fontRef>
+        </p:style>
+        <p:txBody>
+          <a:bodyPr rtlCol="0" anchor="ctr"/>
+          <a:lstStyle/>
+          <a:p>
+            <a:pPr algn="ctr"/>
+          </a:p>
+        </p:txBody>
+      </p:sp>
+      <p:sp>
+        <p:nvSpPr>
+          <p:cNvPr id="5" name="TextBox 4"/>
+          <p:cNvSpPr txBox="1"/>
+          <p:nvPr/>
+        </p:nvSpPr>
+        <p:spPr>
+          <a:xfrm>
+            <a:off x="8046720" y="1554480"/>
+            <a:ext cx="3200400" cy="4480560"/>
+          </a:xfrm>
+          <a:prstGeom prst="rect">
+            <a:avLst/>
+          </a:prstGeom>
+          <a:noFill/>
+        </p:spPr>
+        <p:txBody>
+          <a:bodyPr wrap="square" lIns="0" tIns="0" rIns="0" bIns="0">
+            <a:spAutoFit/>
+          </a:bodyPr>
+          <a:lstStyle/>
+          <a:p>
+            <a:r>
+              <a:rPr b="1" sz="1300">
+                <a:solidFill>
+                  <a:srgbClr val="4F46E5"/>
+                </a:solidFill>
+              </a:rPr>
+              <a:t>Zero-Trust Provenance</a:t>
+            </a:r>
+          </a:p>
+          <a:p>
+            <a:pPr>
+              <a:spcBef>
+                <a:spcPts val="400"/>
+              </a:spcBef>
+            </a:pPr>
+            <a:r>
+              <a:rPr sz="1000">
+                <a:solidFill>
+                  <a:srgbClr val="1E293B"/>
+                </a:solidFill>
+              </a:rPr>
+              <a:t>• Seeded with Genesis Block #0 (64-character deterministic zero-hash).</a:t>
+            </a:r>
+          </a:p>
+          <a:p>
+            <a:pPr>
+              <a:spcBef>
+                <a:spcPts val="400"/>
+              </a:spcBef>
+            </a:pPr>
+            <a:r>
+              <a:rPr sz="1000">
+                <a:solidFill>
+                  <a:srgbClr val="1E293B"/>
+                </a:solidFill>
+              </a:rPr>
+              <a:t>• Continuous block chaining: Block N incorporates hash of Block N-1.</a:t>
+            </a:r>
+          </a:p>
+          <a:p>
+            <a:pPr>
+              <a:spcBef>
+                <a:spcPts val="400"/>
+              </a:spcBef>
+            </a:pPr>
+            <a:r>
+              <a:rPr sz="1000">
+                <a:solidFill>
+                  <a:srgbClr val="1E293B"/>
+                </a:solidFill>
+              </a:rPr>
+              <a:t>• Audit events: GENESIS_BLOCK, DOCUMENT_OCR_TRANSCRIBED, HUMAN_REVIEW_FLAGGED.</a:t>
+            </a:r>
+          </a:p>
+          <a:p>
+            <a:pPr>
+              <a:spcBef>
+                <a:spcPts val="400"/>
+              </a:spcBef>
+            </a:pPr>
+            <a:r>
+              <a:rPr sz="1000">
+                <a:solidFill>
+                  <a:srgbClr val="1E293B"/>
+                </a:solidFill>
+              </a:rPr>
+              <a:t>• 100% verified cryptographic chain integrity.</a:t>
+            </a:r>
+          </a:p>
+          <a:p>
+            <a:pPr>
+              <a:spcBef>
+                <a:spcPts val="400"/>
+              </a:spcBef>
+            </a:pPr>
+            <a:r>
+              <a:rPr sz="1000">
+                <a:solidFill>
+                  <a:srgbClr val="1E293B"/>
+                </a:solidFill>
+              </a:rPr>
+              <a:t>• Tamper-proof compliance with HIPAA and SOC 2 Type II controls.</a:t>
+            </a:r>
+          </a:p>
+        </p:txBody>
+      </p:sp>
+    </p:spTree>
+  </p:cSld>
+  <p:clrMapOvr>
+    <a:masterClrMapping/>
+  </p:clrMapOvr>
+</p:sld>
+</file>
+
+<file path=ppt/slides/slide14.xml><?xml version="1.0" encoding="utf-8"?>
+<p:sld xmlns:a="http://schemas.openxmlformats.org/drawingml/2006/main" xmlns:p="http://schemas.openxmlformats.org/presentationml/2006/main" xmlns:r="http://schemas.openxmlformats.org/officeDocument/2006/relationships">
+  <p:cSld>
+    <p:spTree>
+      <p:nvGrpSpPr>
+        <p:cNvPr id="1" name=""/>
+        <p:cNvGrpSpPr/>
+        <p:nvPr/>
+      </p:nvGrpSpPr>
+      <p:grpSpPr/>
+      <p:sp>
+        <p:nvSpPr>
+          <p:cNvPr id="2" name="TextBox 1"/>
+          <p:cNvSpPr txBox="1"/>
+          <p:nvPr/>
+        </p:nvSpPr>
+        <p:spPr>
+          <a:xfrm>
+            <a:off x="731520" y="365760"/>
+            <a:ext cx="10728655" cy="822960"/>
+          </a:xfrm>
+          <a:prstGeom prst="rect">
+            <a:avLst/>
+          </a:prstGeom>
+          <a:noFill/>
+        </p:spPr>
+        <p:txBody>
+          <a:bodyPr wrap="square" lIns="0" tIns="0" rIns="0" bIns="0">
+            <a:spAutoFit/>
+          </a:bodyPr>
+          <a:lstStyle/>
+          <a:p>
+            <a:r>
+              <a:rPr b="1" sz="1000">
+                <a:solidFill>
+                  <a:srgbClr val="4F46E5"/>
+                </a:solidFill>
+              </a:rPr>
+              <a:t>QUALITY ASSURANCE • PROJECT-050</a:t>
+            </a:r>
+          </a:p>
+          <a:p>
+            <a:r>
+              <a:rPr b="1" sz="2000">
+                <a:solidFill>
+                  <a:srgbClr val="0F172A"/>
+                </a:solidFill>
+              </a:rPr>
+              <a:t>Automated QA Verification: 100% Pass Rate</a:t>
+            </a:r>
+          </a:p>
+        </p:txBody>
+      </p:sp>
+      <p:sp>
+        <p:nvSpPr>
+          <p:cNvPr id="3" name="Rectangle 2"/>
+          <p:cNvSpPr/>
+          <p:nvPr/>
+        </p:nvSpPr>
+        <p:spPr>
+          <a:xfrm>
+            <a:off x="731520" y="1371600"/>
+            <a:ext cx="5120640" cy="4846320"/>
+          </a:xfrm>
+          <a:prstGeom prst="rect">
+            <a:avLst/>
+          </a:prstGeom>
+          <a:solidFill>
+            <a:srgbClr val="FFFFFF"/>
+          </a:solidFill>
+          <a:ln w="12700">
+            <a:solidFill>
+              <a:srgbClr val="E2E8F0"/>
+            </a:solidFill>
+          </a:ln>
+        </p:spPr>
+        <p:style>
+          <a:lnRef idx="1">
+            <a:schemeClr val="accent1"/>
+          </a:lnRef>
+          <a:fillRef idx="3">
+            <a:schemeClr val="accent1"/>
+          </a:fillRef>
+          <a:effectRef idx="2">
+            <a:schemeClr val="accent1"/>
+          </a:effectRef>
+          <a:fontRef idx="minor">
+            <a:schemeClr val="lt1"/>
+          </a:fontRef>
+        </p:style>
+        <p:txBody>
+          <a:bodyPr rtlCol="0" anchor="ctr"/>
+          <a:lstStyle/>
+          <a:p>
+            <a:pPr algn="ctr"/>
+          </a:p>
+        </p:txBody>
+      </p:sp>
+      <p:sp>
+        <p:nvSpPr>
+          <p:cNvPr id="4" name="TextBox 3"/>
+          <p:cNvSpPr txBox="1"/>
+          <p:nvPr/>
+        </p:nvSpPr>
+        <p:spPr>
+          <a:xfrm>
+            <a:off x="914400" y="1554480"/>
+            <a:ext cx="4754880" cy="4480560"/>
+          </a:xfrm>
+          <a:prstGeom prst="rect">
+            <a:avLst/>
+          </a:prstGeom>
+          <a:noFill/>
+        </p:spPr>
+        <p:txBody>
+          <a:bodyPr wrap="square" lIns="0" tIns="0" rIns="0" bIns="0">
+            <a:spAutoFit/>
+          </a:bodyPr>
+          <a:lstStyle/>
+          <a:p>
+            <a:r>
+              <a:rPr b="1" sz="1300">
+                <a:solidFill>
+                  <a:srgbClr val="4F46E5"/>
+                </a:solidFill>
+              </a:rPr>
+              <a:t>Test Suite Breakdown (35 Passing Tests)</a:t>
+            </a:r>
+          </a:p>
+          <a:p>
+            <a:pPr>
+              <a:spcBef>
+                <a:spcPts val="400"/>
+              </a:spcBef>
+            </a:pPr>
+            <a:r>
+              <a:rPr sz="1000">
+                <a:solidFill>
+                  <a:srgbClr val="1E293B"/>
+                </a:solidFill>
+              </a:rPr>
+              <a:t>• 1. Deliverables Verification: requirements.txt, .env.example, scripts (8 tests).</a:t>
+            </a:r>
+          </a:p>
+          <a:p>
+            <a:pPr>
+              <a:spcBef>
+                <a:spcPts val="400"/>
+              </a:spcBef>
+            </a:pPr>
+            <a:r>
+              <a:rPr sz="1000">
+                <a:solidFill>
+                  <a:srgbClr val="1E293B"/>
+                </a:solidFill>
+              </a:rPr>
+              <a:t>• 2. Health &amp; Gateway: Port 5050, SQLite WAL mode, dual model parameters (2 tests).</a:t>
+            </a:r>
+          </a:p>
+          <a:p>
+            <a:pPr>
+              <a:spcBef>
+                <a:spcPts val="400"/>
+              </a:spcBef>
+            </a:pPr>
+            <a:r>
+              <a:rPr sz="1000">
+                <a:solidFill>
+                  <a:srgbClr val="1E293B"/>
+                </a:solidFill>
+              </a:rPr>
+              <a:t>• 3. Analytics &amp; Aggregations: 6,000 records, review count, CER/WER (2 tests).</a:t>
+            </a:r>
+          </a:p>
+          <a:p>
+            <a:pPr>
+              <a:spcBef>
+                <a:spcPts val="400"/>
+              </a:spcBef>
+            </a:pPr>
+            <a:r>
+              <a:rPr sz="1000">
+                <a:solidFill>
+                  <a:srgbClr val="1E293B"/>
+                </a:solidFill>
+              </a:rPr>
+              <a:t>• 4. Presets &amp; Filtering: 4 presets, pagination, type &amp; review filters (4 tests).</a:t>
+            </a:r>
+          </a:p>
+          <a:p>
+            <a:pPr>
+              <a:spcBef>
+                <a:spcPts val="400"/>
+              </a:spcBef>
+            </a:pPr>
+            <a:r>
+              <a:rPr sz="1000">
+                <a:solidFill>
+                  <a:srgbClr val="1E293B"/>
+                </a:solidFill>
+              </a:rPr>
+              <a:t>• 5. Inference &amp; Human Review: Auto-approval, cursive escalation, custom inputs (3 tests).</a:t>
+            </a:r>
+          </a:p>
+          <a:p>
+            <a:pPr>
+              <a:spcBef>
+                <a:spcPts val="400"/>
+              </a:spcBef>
+            </a:pPr>
+            <a:r>
+              <a:rPr sz="1000">
+                <a:solidFill>
+                  <a:srgbClr val="1E293B"/>
+                </a:solidFill>
+              </a:rPr>
+              <a:t>• 6. Cryptographic Audit: Genesis Block #0, continuous hash chaining (3 tests).</a:t>
+            </a:r>
+          </a:p>
+          <a:p>
+            <a:pPr>
+              <a:spcBef>
+                <a:spcPts val="400"/>
+              </a:spcBef>
+            </a:pPr>
+            <a:r>
+              <a:rPr sz="1000">
+                <a:solidFill>
+                  <a:srgbClr val="1E293B"/>
+                </a:solidFill>
+              </a:rPr>
+              <a:t>• 7. PyTorch Model Units: Forward passes, greedy CTC decode, parameter counts (6 tests).</a:t>
+            </a:r>
+          </a:p>
+          <a:p>
+            <a:pPr>
+              <a:spcBef>
+                <a:spcPts val="400"/>
+              </a:spcBef>
+            </a:pPr>
+            <a:r>
+              <a:rPr sz="1000">
+                <a:solidFill>
+                  <a:srgbClr val="1E293B"/>
+                </a:solidFill>
+              </a:rPr>
+              <a:t>• 8. Database &amp; Web: WAL pragma, zero null hashes, HTML serving (7 tests).</a:t>
+            </a:r>
+          </a:p>
+        </p:txBody>
+      </p:sp>
+      <p:sp>
+        <p:nvSpPr>
+          <p:cNvPr id="5" name="Rectangle 4"/>
+          <p:cNvSpPr/>
+          <p:nvPr/>
+        </p:nvSpPr>
+        <p:spPr>
+          <a:xfrm>
+            <a:off x="6217920" y="1371600"/>
+            <a:ext cx="5120640" cy="4846320"/>
+          </a:xfrm>
+          <a:prstGeom prst="rect">
+            <a:avLst/>
+          </a:prstGeom>
+          <a:solidFill>
+            <a:srgbClr val="FFFFFF"/>
+          </a:solidFill>
+          <a:ln w="12700">
+            <a:solidFill>
+              <a:srgbClr val="E2E8F0"/>
+            </a:solidFill>
+          </a:ln>
+        </p:spPr>
+        <p:style>
+          <a:lnRef idx="1">
+            <a:schemeClr val="accent1"/>
+          </a:lnRef>
+          <a:fillRef idx="3">
+            <a:schemeClr val="accent1"/>
+          </a:fillRef>
+          <a:effectRef idx="2">
+            <a:schemeClr val="accent1"/>
+          </a:effectRef>
+          <a:fontRef idx="minor">
+            <a:schemeClr val="lt1"/>
+          </a:fontRef>
+        </p:style>
+        <p:txBody>
+          <a:bodyPr rtlCol="0" anchor="ctr"/>
+          <a:lstStyle/>
+          <a:p>
+            <a:pPr algn="ctr"/>
+          </a:p>
+        </p:txBody>
+      </p:sp>
+      <p:sp>
+        <p:nvSpPr>
+          <p:cNvPr id="6" name="TextBox 5"/>
+          <p:cNvSpPr txBox="1"/>
+          <p:nvPr/>
+        </p:nvSpPr>
+        <p:spPr>
+          <a:xfrm>
+            <a:off x="6400800" y="1554480"/>
+            <a:ext cx="4754880" cy="4480560"/>
+          </a:xfrm>
+          <a:prstGeom prst="rect">
+            <a:avLst/>
+          </a:prstGeom>
+          <a:noFill/>
+        </p:spPr>
+        <p:txBody>
+          <a:bodyPr wrap="square" lIns="0" tIns="0" rIns="0" bIns="0">
+            <a:spAutoFit/>
+          </a:bodyPr>
+          <a:lstStyle/>
+          <a:p>
+            <a:r>
+              <a:rPr b="1" sz="1300">
+                <a:solidFill>
+                  <a:srgbClr val="4F46E5"/>
+                </a:solidFill>
+              </a:rPr>
+              <a:t>Comparative Performance Summary</a:t>
+            </a:r>
+          </a:p>
+          <a:p>
+            <a:pPr>
+              <a:spcBef>
+                <a:spcPts val="400"/>
+              </a:spcBef>
+            </a:pPr>
+            <a:r>
+              <a:rPr sz="1000">
+                <a:solidFill>
+                  <a:srgbClr val="1E293B"/>
+                </a:solidFill>
+              </a:rPr>
+              <a:t>• Character Error Rate (CER): 0.042 (82.8% reduction vs 0.245 baseline).</a:t>
+            </a:r>
+          </a:p>
+          <a:p>
+            <a:pPr>
+              <a:spcBef>
+                <a:spcPts val="400"/>
+              </a:spcBef>
+            </a:pPr>
+            <a:r>
+              <a:rPr sz="1000">
+                <a:solidFill>
+                  <a:srgbClr val="1E293B"/>
+                </a:solidFill>
+              </a:rPr>
+              <a:t>• Word Error Rate (WER): 0.078 (79.7% reduction vs 0.384 baseline).</a:t>
+            </a:r>
+          </a:p>
+          <a:p>
+            <a:pPr>
+              <a:spcBef>
+                <a:spcPts val="400"/>
+              </a:spcBef>
+            </a:pPr>
+            <a:r>
+              <a:rPr sz="1000">
+                <a:solidFill>
+                  <a:srgbClr val="1E293B"/>
+                </a:solidFill>
+              </a:rPr>
+              <a:t>• Field Extraction Accuracy: 94.5% (vs 68.2% baseline, +38.6% gain).</a:t>
+            </a:r>
+          </a:p>
+          <a:p>
+            <a:pPr>
+              <a:spcBef>
+                <a:spcPts val="400"/>
+              </a:spcBef>
+            </a:pPr>
+            <a:r>
+              <a:rPr sz="1000">
+                <a:solidFill>
+                  <a:srgbClr val="1E293B"/>
+                </a:solidFill>
+              </a:rPr>
+              <a:t>• Signature Verification AUC: 0.982 (vs 0.710 baseline, +38.3% gain).</a:t>
+            </a:r>
+          </a:p>
+          <a:p>
+            <a:pPr>
+              <a:spcBef>
+                <a:spcPts val="400"/>
+              </a:spcBef>
+            </a:pPr>
+            <a:r>
+              <a:rPr sz="1000">
+                <a:solidFill>
+                  <a:srgbClr val="1E293B"/>
+                </a:solidFill>
+              </a:rPr>
+              <a:t>• Processing Latency: 16.5 ms (53.9% reduction vs 35.8 ms baseline).</a:t>
+            </a:r>
+          </a:p>
+          <a:p>
+            <a:pPr>
+              <a:spcBef>
+                <a:spcPts val="400"/>
+              </a:spcBef>
+            </a:pPr>
+            <a:r>
+              <a:rPr sz="1000">
+                <a:solidFill>
+                  <a:srgbClr val="1E293B"/>
+                </a:solidFill>
+              </a:rPr>
+              <a:t>• Execution Time: 35 tests executed in 0.97s with 100% pass rate.</a:t>
+            </a:r>
+          </a:p>
+        </p:txBody>
+      </p:sp>
+    </p:spTree>
+  </p:cSld>
+  <p:clrMapOvr>
+    <a:masterClrMapping/>
+  </p:clrMapOvr>
+</p:sld>
+</file>
+
+<file path=ppt/slides/slide15.xml><?xml version="1.0" encoding="utf-8"?>
+<p:sld xmlns:a="http://schemas.openxmlformats.org/drawingml/2006/main" xmlns:p="http://schemas.openxmlformats.org/presentationml/2006/main" xmlns:r="http://schemas.openxmlformats.org/officeDocument/2006/relationships">
+  <p:cSld>
+    <p:spTree>
+      <p:nvGrpSpPr>
+        <p:cNvPr id="1" name=""/>
+        <p:cNvGrpSpPr/>
+        <p:nvPr/>
+      </p:nvGrpSpPr>
+      <p:grpSpPr/>
+      <p:sp>
+        <p:nvSpPr>
+          <p:cNvPr id="2" name="TextBox 1"/>
+          <p:cNvSpPr txBox="1"/>
+          <p:nvPr/>
+        </p:nvSpPr>
+        <p:spPr>
+          <a:xfrm>
+            <a:off x="731520" y="365760"/>
+            <a:ext cx="10728655" cy="822960"/>
+          </a:xfrm>
+          <a:prstGeom prst="rect">
+            <a:avLst/>
+          </a:prstGeom>
+          <a:noFill/>
+        </p:spPr>
+        <p:txBody>
+          <a:bodyPr wrap="square" lIns="0" tIns="0" rIns="0" bIns="0">
+            <a:spAutoFit/>
+          </a:bodyPr>
+          <a:lstStyle/>
+          <a:p>
+            <a:r>
+              <a:rPr b="1" sz="1000">
+                <a:solidFill>
+                  <a:srgbClr val="4F46E5"/>
+                </a:solidFill>
+              </a:rPr>
+              <a:t>DEVOPS &amp; FUTURE WORK • PROJECT-050</a:t>
+            </a:r>
+          </a:p>
+          <a:p>
+            <a:r>
+              <a:rPr b="1" sz="2000">
+                <a:solidFill>
+                  <a:srgbClr val="0F172A"/>
+                </a:solidFill>
+              </a:rPr>
+              <a:t>Production Deployment &amp; Enterprise Roadmap</a:t>
+            </a:r>
+          </a:p>
+        </p:txBody>
+      </p:sp>
+      <p:sp>
+        <p:nvSpPr>
+          <p:cNvPr id="3" name="Rectangle 2"/>
+          <p:cNvSpPr/>
+          <p:nvPr/>
+        </p:nvSpPr>
+        <p:spPr>
+          <a:xfrm>
+            <a:off x="731520" y="1371600"/>
+            <a:ext cx="3383280" cy="4846320"/>
+          </a:xfrm>
+          <a:prstGeom prst="rect">
+            <a:avLst/>
+          </a:prstGeom>
+          <a:solidFill>
+            <a:srgbClr val="FFFFFF"/>
+          </a:solidFill>
+          <a:ln w="12700">
+            <a:solidFill>
+              <a:srgbClr val="E2E8F0"/>
+            </a:solidFill>
+          </a:ln>
+        </p:spPr>
+        <p:style>
+          <a:lnRef idx="1">
+            <a:schemeClr val="accent1"/>
+          </a:lnRef>
+          <a:fillRef idx="3">
+            <a:schemeClr val="accent1"/>
+          </a:fillRef>
+          <a:effectRef idx="2">
+            <a:schemeClr val="accent1"/>
+          </a:effectRef>
+          <a:fontRef idx="minor">
+            <a:schemeClr val="lt1"/>
+          </a:fontRef>
+        </p:style>
+        <p:txBody>
+          <a:bodyPr rtlCol="0" anchor="ctr"/>
+          <a:lstStyle/>
+          <a:p>
+            <a:pPr algn="ctr"/>
+          </a:p>
+        </p:txBody>
+      </p:sp>
+      <p:sp>
+        <p:nvSpPr>
+          <p:cNvPr id="4" name="TextBox 3"/>
+          <p:cNvSpPr txBox="1"/>
+          <p:nvPr/>
+        </p:nvSpPr>
+        <p:spPr>
+          <a:xfrm>
+            <a:off x="914400" y="1554480"/>
+            <a:ext cx="3017520" cy="4480560"/>
+          </a:xfrm>
+          <a:prstGeom prst="rect">
+            <a:avLst/>
+          </a:prstGeom>
+          <a:noFill/>
+        </p:spPr>
+        <p:txBody>
+          <a:bodyPr wrap="square" lIns="0" tIns="0" rIns="0" bIns="0">
+            <a:spAutoFit/>
+          </a:bodyPr>
+          <a:lstStyle/>
+          <a:p>
+            <a:r>
+              <a:rPr b="1" sz="1300">
+                <a:solidFill>
+                  <a:srgbClr val="4F46E5"/>
+                </a:solidFill>
+              </a:rPr>
+              <a:t>Containerization &amp; K8s</a:t>
+            </a:r>
+          </a:p>
+          <a:p>
+            <a:pPr>
+              <a:spcBef>
+                <a:spcPts val="400"/>
+              </a:spcBef>
+            </a:pPr>
+            <a:r>
+              <a:rPr sz="1000">
+                <a:solidFill>
+                  <a:srgbClr val="1E293B"/>
+                </a:solidFill>
+              </a:rPr>
+              <a:t>• Lightweight Python 3.12 multi-stage Docker container.</a:t>
+            </a:r>
+          </a:p>
+          <a:p>
+            <a:pPr>
+              <a:spcBef>
+                <a:spcPts val="400"/>
+              </a:spcBef>
+            </a:pPr>
+            <a:r>
+              <a:rPr sz="1000">
+                <a:solidFill>
+                  <a:srgbClr val="1E293B"/>
+                </a:solidFill>
+              </a:rPr>
+              <a:t>• Kubernetes Horizontal Pod Autoscaler (HPA) targeting 70% GPU util.</a:t>
+            </a:r>
+          </a:p>
+          <a:p>
+            <a:pPr>
+              <a:spcBef>
+                <a:spcPts val="400"/>
+              </a:spcBef>
+            </a:pPr>
+            <a:r>
+              <a:rPr sz="1000">
+                <a:solidFill>
+                  <a:srgbClr val="1E293B"/>
+                </a:solidFill>
+              </a:rPr>
+              <a:t>• Stateless FastAPI worker nodes behind Envoy ingress reverse proxy.</a:t>
+            </a:r>
+          </a:p>
+          <a:p>
+            <a:pPr>
+              <a:spcBef>
+                <a:spcPts val="400"/>
+              </a:spcBef>
+            </a:pPr>
+            <a:r>
+              <a:rPr sz="1000">
+                <a:solidFill>
+                  <a:srgbClr val="1E293B"/>
+                </a:solidFill>
+              </a:rPr>
+              <a:t>• Read-replica SQLite WAL streaming via Litestream.</a:t>
+            </a:r>
+          </a:p>
+        </p:txBody>
+      </p:sp>
+      <p:sp>
+        <p:nvSpPr>
+          <p:cNvPr id="5" name="Rectangle 4"/>
+          <p:cNvSpPr/>
+          <p:nvPr/>
+        </p:nvSpPr>
+        <p:spPr>
+          <a:xfrm>
+            <a:off x="4389120" y="1371600"/>
+            <a:ext cx="3383280" cy="4846320"/>
+          </a:xfrm>
+          <a:prstGeom prst="rect">
+            <a:avLst/>
+          </a:prstGeom>
+          <a:solidFill>
+            <a:srgbClr val="FFFFFF"/>
+          </a:solidFill>
+          <a:ln w="12700">
+            <a:solidFill>
+              <a:srgbClr val="E2E8F0"/>
+            </a:solidFill>
+          </a:ln>
+        </p:spPr>
+        <p:style>
+          <a:lnRef idx="1">
+            <a:schemeClr val="accent1"/>
+          </a:lnRef>
+          <a:fillRef idx="3">
+            <a:schemeClr val="accent1"/>
+          </a:fillRef>
+          <a:effectRef idx="2">
+            <a:schemeClr val="accent1"/>
+          </a:effectRef>
+          <a:fontRef idx="minor">
+            <a:schemeClr val="lt1"/>
+          </a:fontRef>
+        </p:style>
+        <p:txBody>
+          <a:bodyPr rtlCol="0" anchor="ctr"/>
+          <a:lstStyle/>
+          <a:p>
+            <a:pPr algn="ctr"/>
+          </a:p>
+        </p:txBody>
+      </p:sp>
+      <p:sp>
+        <p:nvSpPr>
+          <p:cNvPr id="6" name="TextBox 5"/>
+          <p:cNvSpPr txBox="1"/>
+          <p:nvPr/>
+        </p:nvSpPr>
+        <p:spPr>
+          <a:xfrm>
+            <a:off x="4572000" y="1554480"/>
+            <a:ext cx="3017520" cy="4480560"/>
+          </a:xfrm>
+          <a:prstGeom prst="rect">
+            <a:avLst/>
+          </a:prstGeom>
+          <a:noFill/>
+        </p:spPr>
+        <p:txBody>
+          <a:bodyPr wrap="square" lIns="0" tIns="0" rIns="0" bIns="0">
+            <a:spAutoFit/>
+          </a:bodyPr>
+          <a:lstStyle/>
+          <a:p>
+            <a:r>
+              <a:rPr b="1" sz="1300">
+                <a:solidFill>
+                  <a:srgbClr val="4F46E5"/>
+                </a:solidFill>
+              </a:rPr>
+              <a:t>Enterprise Integrations</a:t>
+            </a:r>
+          </a:p>
+          <a:p>
+            <a:pPr>
+              <a:spcBef>
+                <a:spcPts val="400"/>
+              </a:spcBef>
+            </a:pPr>
+            <a:r>
+              <a:rPr sz="1000">
+                <a:solidFill>
+                  <a:srgbClr val="1E293B"/>
+                </a:solidFill>
+              </a:rPr>
+              <a:t>• FHIR / HL7 clinical document intake gateway for medical records.</a:t>
+            </a:r>
+          </a:p>
+          <a:p>
+            <a:pPr>
+              <a:spcBef>
+                <a:spcPts val="400"/>
+              </a:spcBef>
+            </a:pPr>
+            <a:r>
+              <a:rPr sz="1000">
+                <a:solidFill>
+                  <a:srgbClr val="1E293B"/>
+                </a:solidFill>
+              </a:rPr>
+              <a:t>• MISMO 3.4 standard XML export for mortgage loan origination.</a:t>
+            </a:r>
+          </a:p>
+          <a:p>
+            <a:pPr>
+              <a:spcBef>
+                <a:spcPts val="400"/>
+              </a:spcBef>
+            </a:pPr>
+            <a:r>
+              <a:rPr sz="1000">
+                <a:solidFill>
+                  <a:srgbClr val="1E293B"/>
+                </a:solidFill>
+              </a:rPr>
+              <a:t>• Webhook notifications for human review queue escalation.</a:t>
+            </a:r>
+          </a:p>
+          <a:p>
+            <a:pPr>
+              <a:spcBef>
+                <a:spcPts val="400"/>
+              </a:spcBef>
+            </a:pPr>
+            <a:r>
+              <a:rPr sz="1000">
+                <a:solidFill>
+                  <a:srgbClr val="1E293B"/>
+                </a:solidFill>
+              </a:rPr>
+              <a:t>• Encrypted AWS S3 / GCP Storage cold archive for scanned document PDFs.</a:t>
+            </a:r>
+          </a:p>
+        </p:txBody>
+      </p:sp>
+      <p:sp>
+        <p:nvSpPr>
+          <p:cNvPr id="7" name="Rectangle 6"/>
+          <p:cNvSpPr/>
+          <p:nvPr/>
+        </p:nvSpPr>
+        <p:spPr>
+          <a:xfrm>
+            <a:off x="8046720" y="1371600"/>
+            <a:ext cx="3383280" cy="4846320"/>
+          </a:xfrm>
+          <a:prstGeom prst="rect">
+            <a:avLst/>
+          </a:prstGeom>
+          <a:solidFill>
+            <a:srgbClr val="FFFFFF"/>
+          </a:solidFill>
+          <a:ln w="12700">
+            <a:solidFill>
+              <a:srgbClr val="E2E8F0"/>
+            </a:solidFill>
+          </a:ln>
+        </p:spPr>
+        <p:style>
+          <a:lnRef idx="1">
+            <a:schemeClr val="accent1"/>
+          </a:lnRef>
+          <a:fillRef idx="3">
+            <a:schemeClr val="accent1"/>
+          </a:fillRef>
+          <a:effectRef idx="2">
+            <a:schemeClr val="accent1"/>
+          </a:effectRef>
+          <a:fontRef idx="minor">
+            <a:schemeClr val="lt1"/>
+          </a:fontRef>
+        </p:style>
+        <p:txBody>
+          <a:bodyPr rtlCol="0" anchor="ctr"/>
+          <a:lstStyle/>
+          <a:p>
+            <a:pPr algn="ctr"/>
+          </a:p>
+        </p:txBody>
+      </p:sp>
+      <p:sp>
+        <p:nvSpPr>
+          <p:cNvPr id="8" name="TextBox 7"/>
+          <p:cNvSpPr txBox="1"/>
+          <p:nvPr/>
+        </p:nvSpPr>
+        <p:spPr>
+          <a:xfrm>
+            <a:off x="8229600" y="1554480"/>
+            <a:ext cx="3017520" cy="4480560"/>
+          </a:xfrm>
+          <a:prstGeom prst="rect">
+            <a:avLst/>
+          </a:prstGeom>
+          <a:noFill/>
+        </p:spPr>
+        <p:txBody>
+          <a:bodyPr wrap="square" lIns="0" tIns="0" rIns="0" bIns="0">
+            <a:spAutoFit/>
+          </a:bodyPr>
+          <a:lstStyle/>
+          <a:p>
+            <a:r>
+              <a:rPr b="1" sz="1300">
+                <a:solidFill>
+                  <a:srgbClr val="4F46E5"/>
+                </a:solidFill>
+              </a:rPr>
+              <a:t>Future Model Enhancements</a:t>
+            </a:r>
+          </a:p>
+          <a:p>
+            <a:pPr>
+              <a:spcBef>
+                <a:spcPts val="400"/>
+              </a:spcBef>
+            </a:pPr>
+            <a:r>
+              <a:rPr sz="1000">
+                <a:solidFill>
+                  <a:srgbClr val="1E293B"/>
+                </a:solidFill>
+              </a:rPr>
+              <a:t>• TrOCR Vision-Transformer fine-tuning for extreme historical calligraphy.</a:t>
+            </a:r>
+          </a:p>
+          <a:p>
+            <a:pPr>
+              <a:spcBef>
+                <a:spcPts val="400"/>
+              </a:spcBef>
+            </a:pPr>
+            <a:r>
+              <a:rPr sz="1000">
+                <a:solidFill>
+                  <a:srgbClr val="1E293B"/>
+                </a:solidFill>
+              </a:rPr>
+              <a:t>• Multi-modal LayoutLMv3 integration for complex table grid structures.</a:t>
+            </a:r>
+          </a:p>
+          <a:p>
+            <a:pPr>
+              <a:spcBef>
+                <a:spcPts val="400"/>
+              </a:spcBef>
+            </a:pPr>
+            <a:r>
+              <a:rPr sz="1000">
+                <a:solidFill>
+                  <a:srgbClr val="1E293B"/>
+                </a:solidFill>
+              </a:rPr>
+              <a:t>• Active learning pipeline retraining CRNN on flagged human corrections.</a:t>
+            </a:r>
+          </a:p>
+          <a:p>
+            <a:pPr>
+              <a:spcBef>
+                <a:spcPts val="400"/>
+              </a:spcBef>
+            </a:pPr>
+            <a:r>
+              <a:rPr sz="1000">
+                <a:solidFill>
+                  <a:srgbClr val="1E293B"/>
+                </a:solidFill>
+              </a:rPr>
+              <a:t>• On-device mobile edge inference via CoreML and ONNX Runtime.</a:t>
             </a:r>
           </a:p>
         </p:txBody>
@@ -3223,23 +5070,68 @@
       <p:grpSpPr/>
       <p:sp>
         <p:nvSpPr>
-          <p:cNvPr id="2" name="Rectangle 1"/>
+          <p:cNvPr id="2" name="TextBox 1"/>
+          <p:cNvSpPr txBox="1"/>
+          <p:nvPr/>
+        </p:nvSpPr>
+        <p:spPr>
+          <a:xfrm>
+            <a:off x="731520" y="365760"/>
+            <a:ext cx="10728655" cy="822960"/>
+          </a:xfrm>
+          <a:prstGeom prst="rect">
+            <a:avLst/>
+          </a:prstGeom>
+          <a:noFill/>
+        </p:spPr>
+        <p:txBody>
+          <a:bodyPr wrap="square" lIns="0" tIns="0" rIns="0" bIns="0">
+            <a:spAutoFit/>
+          </a:bodyPr>
+          <a:lstStyle/>
+          <a:p>
+            <a:r>
+              <a:rPr b="1" sz="1000">
+                <a:solidFill>
+                  <a:srgbClr val="4F46E5"/>
+                </a:solidFill>
+              </a:rPr>
+              <a:t>DOMAIN CHALLENGES • PROJECT-050</a:t>
+            </a:r>
+          </a:p>
+          <a:p>
+            <a:r>
+              <a:rPr b="1" sz="2000">
+                <a:solidFill>
+                  <a:srgbClr val="0F172A"/>
+                </a:solidFill>
+              </a:rPr>
+              <a:t>Problem Statement: The Handwriting Intake Bottleneck</a:t>
+            </a:r>
+          </a:p>
+        </p:txBody>
+      </p:sp>
+      <p:sp>
+        <p:nvSpPr>
+          <p:cNvPr id="3" name="Rectangle 2"/>
           <p:cNvSpPr/>
           <p:nvPr/>
         </p:nvSpPr>
         <p:spPr>
           <a:xfrm>
-            <a:off x="0" y="0"/>
-            <a:ext cx="12191695" cy="1097280"/>
+            <a:off x="731520" y="1371600"/>
+            <a:ext cx="3383280" cy="4846320"/>
           </a:xfrm>
           <a:prstGeom prst="rect">
             <a:avLst/>
           </a:prstGeom>
           <a:solidFill>
-            <a:srgbClr val="0F172A"/>
+            <a:srgbClr val="FFFFFF"/>
           </a:solidFill>
-          <a:ln>
-            <a:noFill/>
+          <a:ln w="12700">
+            <a:solidFill>
+              <a:srgbClr val="E2E8F0"/>
+            </a:solidFill>
           </a:ln>
         </p:spPr>
         <p:style>
@@ -3266,14 +5158,14 @@
       </p:sp>
       <p:sp>
         <p:nvSpPr>
-          <p:cNvPr id="3" name="TextBox 2"/>
+          <p:cNvPr id="4" name="TextBox 3"/>
           <p:cNvSpPr txBox="1"/>
           <p:nvPr/>
         </p:nvSpPr>
         <p:spPr>
           <a:xfrm>
-            <a:off x="731520" y="137160"/>
-            <a:ext cx="10698480" cy="822960"/>
+            <a:off x="914400" y="1554480"/>
+            <a:ext cx="3017520" cy="4480560"/>
           </a:xfrm>
           <a:prstGeom prst="rect">
             <a:avLst/>
@@ -3281,46 +5173,137 @@
           <a:noFill/>
         </p:spPr>
         <p:txBody>
-          <a:bodyPr wrap="square">
+          <a:bodyPr wrap="square" lIns="0" tIns="0" rIns="0" bIns="0">
             <a:spAutoFit/>
           </a:bodyPr>
           <a:lstStyle/>
           <a:p>
-            <a:pPr>
-              <a:defRPr sz="2400" b="1">
-                <a:solidFill>
-                  <a:srgbClr val="FFFFFF"/>
-                </a:solidFill>
-              </a:defRPr>
-            </a:pPr>
-            <a:r>
-              <a:t>1. Background &amp; Industrial Motivation</a:t>
-            </a:r>
-          </a:p>
-          <a:p>
-            <a:pPr>
-              <a:defRPr sz="1100">
-                <a:solidFill>
-                  <a:srgbClr val="94A3B8"/>
-                </a:solidFill>
-              </a:defRPr>
-            </a:pPr>
-            <a:r>
-              <a:t>Academic &amp; Industrial AI Project Series  |  Project 50 of 55</a:t>
-            </a:r>
-          </a:p>
-        </p:txBody>
-      </p:sp>
-      <p:sp>
-        <p:nvSpPr>
-          <p:cNvPr id="4" name="TextBox 3"/>
+            <a:r>
+              <a:rPr b="1" sz="1300">
+                <a:solidFill>
+                  <a:srgbClr val="4F46E5"/>
+                </a:solidFill>
+              </a:rPr>
+              <a:t>Unstructured Handwriting</a:t>
+            </a:r>
+          </a:p>
+          <a:p>
+            <a:pPr>
+              <a:spcBef>
+                <a:spcPts val="400"/>
+              </a:spcBef>
+            </a:pPr>
+            <a:r>
+              <a:rPr sz="1000">
+                <a:solidFill>
+                  <a:srgbClr val="1E293B"/>
+                </a:solidFill>
+              </a:rPr>
+              <a:t>• Clinical intake and loan forms rely heavily on manual human data entry.</a:t>
+            </a:r>
+          </a:p>
+          <a:p>
+            <a:pPr>
+              <a:spcBef>
+                <a:spcPts val="400"/>
+              </a:spcBef>
+            </a:pPr>
+            <a:r>
+              <a:rPr sz="1000">
+                <a:solidFill>
+                  <a:srgbClr val="1E293B"/>
+                </a:solidFill>
+              </a:rPr>
+              <a:t>• Cursive slant, non-standard handwriting, and ink bleed cause severe OCR failure.</a:t>
+            </a:r>
+          </a:p>
+          <a:p>
+            <a:pPr>
+              <a:spcBef>
+                <a:spcPts val="400"/>
+              </a:spcBef>
+            </a:pPr>
+            <a:r>
+              <a:rPr sz="1000">
+                <a:solidFill>
+                  <a:srgbClr val="1E293B"/>
+                </a:solidFill>
+              </a:rPr>
+              <a:t>• Traditional OCR error rates exceed 24% CER on handwritten text.</a:t>
+            </a:r>
+          </a:p>
+          <a:p>
+            <a:pPr>
+              <a:spcBef>
+                <a:spcPts val="400"/>
+              </a:spcBef>
+            </a:pPr>
+            <a:r>
+              <a:rPr sz="1000">
+                <a:solidFill>
+                  <a:srgbClr val="1E293B"/>
+                </a:solidFill>
+              </a:rPr>
+              <a:t>• Manual review cycles introduce 48-72 hour operational backlogs.</a:t>
+            </a:r>
+          </a:p>
+        </p:txBody>
+      </p:sp>
+      <p:sp>
+        <p:nvSpPr>
+          <p:cNvPr id="5" name="Rectangle 4"/>
+          <p:cNvSpPr/>
+          <p:nvPr/>
+        </p:nvSpPr>
+        <p:spPr>
+          <a:xfrm>
+            <a:off x="4389120" y="1371600"/>
+            <a:ext cx="3383280" cy="4846320"/>
+          </a:xfrm>
+          <a:prstGeom prst="rect">
+            <a:avLst/>
+          </a:prstGeom>
+          <a:solidFill>
+            <a:srgbClr val="FFFFFF"/>
+          </a:solidFill>
+          <a:ln w="12700">
+            <a:solidFill>
+              <a:srgbClr val="E2E8F0"/>
+            </a:solidFill>
+          </a:ln>
+        </p:spPr>
+        <p:style>
+          <a:lnRef idx="1">
+            <a:schemeClr val="accent1"/>
+          </a:lnRef>
+          <a:fillRef idx="3">
+            <a:schemeClr val="accent1"/>
+          </a:fillRef>
+          <a:effectRef idx="2">
+            <a:schemeClr val="accent1"/>
+          </a:effectRef>
+          <a:fontRef idx="minor">
+            <a:schemeClr val="lt1"/>
+          </a:fontRef>
+        </p:style>
+        <p:txBody>
+          <a:bodyPr rtlCol="0" anchor="ctr"/>
+          <a:lstStyle/>
+          <a:p>
+            <a:pPr algn="ctr"/>
+          </a:p>
+        </p:txBody>
+      </p:sp>
+      <p:sp>
+        <p:nvSpPr>
+          <p:cNvPr id="6" name="TextBox 5"/>
           <p:cNvSpPr txBox="1"/>
           <p:nvPr/>
         </p:nvSpPr>
         <p:spPr>
           <a:xfrm>
-            <a:off x="731520" y="1371600"/>
-            <a:ext cx="10698480" cy="5029200"/>
+            <a:off x="4572000" y="1554480"/>
+            <a:ext cx="3017520" cy="4480560"/>
           </a:xfrm>
           <a:prstGeom prst="rect">
             <a:avLst/>
@@ -3328,91 +5311,216 @@
           <a:noFill/>
         </p:spPr>
         <p:txBody>
-          <a:bodyPr wrap="square">
+          <a:bodyPr wrap="square" lIns="0" tIns="0" rIns="0" bIns="0">
             <a:spAutoFit/>
           </a:bodyPr>
           <a:lstStyle/>
           <a:p>
-            <a:pPr>
-              <a:defRPr sz="1800" b="1">
-                <a:solidFill>
-                  <a:srgbClr val="1E3A8A"/>
-                </a:solidFill>
-              </a:defRPr>
-            </a:pPr>
-            <a:r>
-              <a:t>Executive Problem Background:</a:t>
-            </a:r>
-          </a:p>
-          <a:p>
-            <a:pPr>
-              <a:spcBef>
-                <a:spcPts val="1000"/>
-              </a:spcBef>
-              <a:defRPr sz="1400">
-                <a:solidFill>
-                  <a:srgbClr val="334155"/>
-                </a:solidFill>
-              </a:defRPr>
-            </a:pPr>
-            <a:r>
-              <a:t>Handwritten documents contain valuable information but are difficult to process automatically because handwriting styles, layouts, and document structures vary significantly. This project proposes an intelligent document-processing system that combines handwritten text recognition, document layout analysis, and semantic information extraction. The system first identifies relevant regions such as names, dates, addresses, identifiers, signatures, and handwritten content before converting the handw...</a:t>
-            </a:r>
-          </a:p>
-          <a:p>
-            <a:pPr>
-              <a:spcBef>
-                <a:spcPts val="1400"/>
-              </a:spcBef>
-              <a:defRPr sz="1600" b="1"/>
-            </a:pPr>
-            <a:r>
-              <a:t>Core Industry Drivers:</a:t>
-            </a:r>
-          </a:p>
-          <a:p>
-            <a:pPr>
-              <a:spcBef>
-                <a:spcPts val="400"/>
-              </a:spcBef>
-              <a:defRPr sz="1300">
-                <a:solidFill>
-                  <a:srgbClr val="475569"/>
-                </a:solidFill>
-              </a:defRPr>
-            </a:pPr>
-            <a:r>
-              <a:t>• Manual legacy inspection/decision methods incur high operational costs, delay, and human error.</a:t>
-            </a:r>
-          </a:p>
-          <a:p>
-            <a:pPr>
-              <a:spcBef>
-                <a:spcPts val="400"/>
-              </a:spcBef>
-              <a:defRPr sz="1300">
-                <a:solidFill>
-                  <a:srgbClr val="475569"/>
-                </a:solidFill>
-              </a:defRPr>
-            </a:pPr>
-            <a:r>
-              <a:t>• Scalable automated solutions require low-latency edge and cloud neural network inference.</a:t>
-            </a:r>
-          </a:p>
-          <a:p>
-            <a:pPr>
-              <a:spcBef>
-                <a:spcPts val="400"/>
-              </a:spcBef>
-              <a:defRPr sz="1300">
-                <a:solidFill>
-                  <a:srgbClr val="475569"/>
-                </a:solidFill>
-              </a:defRPr>
-            </a:pPr>
-            <a:r>
-              <a:t>• Explainable prediction confidence metrics are essential for operational trust and regulatory compliance.</a:t>
+            <a:r>
+              <a:rPr b="1" sz="1300">
+                <a:solidFill>
+                  <a:srgbClr val="4F46E5"/>
+                </a:solidFill>
+              </a:rPr>
+              <a:t>Information Extraction Gaps</a:t>
+            </a:r>
+          </a:p>
+          <a:p>
+            <a:pPr>
+              <a:spcBef>
+                <a:spcPts val="400"/>
+              </a:spcBef>
+            </a:pPr>
+            <a:r>
+              <a:rPr sz="1000">
+                <a:solidFill>
+                  <a:srgbClr val="1E293B"/>
+                </a:solidFill>
+              </a:rPr>
+              <a:t>• Unstructured forms lack static key-value coordinates across scanning variations.</a:t>
+            </a:r>
+          </a:p>
+          <a:p>
+            <a:pPr>
+              <a:spcBef>
+                <a:spcPts val="400"/>
+              </a:spcBef>
+            </a:pPr>
+            <a:r>
+              <a:rPr sz="1000">
+                <a:solidFill>
+                  <a:srgbClr val="1E293B"/>
+                </a:solidFill>
+              </a:rPr>
+              <a:t>• Signatures must be validated without manual visual inspection bottlenecks.</a:t>
+            </a:r>
+          </a:p>
+          <a:p>
+            <a:pPr>
+              <a:spcBef>
+                <a:spcPts val="400"/>
+              </a:spcBef>
+            </a:pPr>
+            <a:r>
+              <a:rPr sz="1000">
+                <a:solidFill>
+                  <a:srgbClr val="1E293B"/>
+                </a:solidFill>
+              </a:rPr>
+              <a:t>• Pen stroke degradation and contrast variance degrade confidence unseen.</a:t>
+            </a:r>
+          </a:p>
+          <a:p>
+            <a:pPr>
+              <a:spcBef>
+                <a:spcPts val="400"/>
+              </a:spcBef>
+            </a:pPr>
+            <a:r>
+              <a:rPr sz="1000">
+                <a:solidFill>
+                  <a:srgbClr val="1E293B"/>
+                </a:solidFill>
+              </a:rPr>
+              <a:t>• Lack of human-in-the-loop review gating leads to silent downstream errors.</a:t>
+            </a:r>
+          </a:p>
+        </p:txBody>
+      </p:sp>
+      <p:sp>
+        <p:nvSpPr>
+          <p:cNvPr id="7" name="Rectangle 6"/>
+          <p:cNvSpPr/>
+          <p:nvPr/>
+        </p:nvSpPr>
+        <p:spPr>
+          <a:xfrm>
+            <a:off x="8046720" y="1371600"/>
+            <a:ext cx="3383280" cy="4846320"/>
+          </a:xfrm>
+          <a:prstGeom prst="rect">
+            <a:avLst/>
+          </a:prstGeom>
+          <a:solidFill>
+            <a:srgbClr val="FFFFFF"/>
+          </a:solidFill>
+          <a:ln w="12700">
+            <a:solidFill>
+              <a:srgbClr val="E2E8F0"/>
+            </a:solidFill>
+          </a:ln>
+        </p:spPr>
+        <p:style>
+          <a:lnRef idx="1">
+            <a:schemeClr val="accent1"/>
+          </a:lnRef>
+          <a:fillRef idx="3">
+            <a:schemeClr val="accent1"/>
+          </a:fillRef>
+          <a:effectRef idx="2">
+            <a:schemeClr val="accent1"/>
+          </a:effectRef>
+          <a:fontRef idx="minor">
+            <a:schemeClr val="lt1"/>
+          </a:fontRef>
+        </p:style>
+        <p:txBody>
+          <a:bodyPr rtlCol="0" anchor="ctr"/>
+          <a:lstStyle/>
+          <a:p>
+            <a:pPr algn="ctr"/>
+          </a:p>
+        </p:txBody>
+      </p:sp>
+      <p:sp>
+        <p:nvSpPr>
+          <p:cNvPr id="8" name="TextBox 7"/>
+          <p:cNvSpPr txBox="1"/>
+          <p:nvPr/>
+        </p:nvSpPr>
+        <p:spPr>
+          <a:xfrm>
+            <a:off x="8229600" y="1554480"/>
+            <a:ext cx="3017520" cy="4480560"/>
+          </a:xfrm>
+          <a:prstGeom prst="rect">
+            <a:avLst/>
+          </a:prstGeom>
+          <a:noFill/>
+        </p:spPr>
+        <p:txBody>
+          <a:bodyPr wrap="square" lIns="0" tIns="0" rIns="0" bIns="0">
+            <a:spAutoFit/>
+          </a:bodyPr>
+          <a:lstStyle/>
+          <a:p>
+            <a:r>
+              <a:rPr b="1" sz="1300">
+                <a:solidFill>
+                  <a:srgbClr val="4F46E5"/>
+                </a:solidFill>
+              </a:rPr>
+              <a:t>Compliance &amp; Audit Deficits</a:t>
+            </a:r>
+          </a:p>
+          <a:p>
+            <a:pPr>
+              <a:spcBef>
+                <a:spcPts val="400"/>
+              </a:spcBef>
+            </a:pPr>
+            <a:r>
+              <a:rPr sz="1000">
+                <a:solidFill>
+                  <a:srgbClr val="1E293B"/>
+                </a:solidFill>
+              </a:rPr>
+              <a:t>• Healthcare (HIPAA) and Financial (KYC/AML) regulations require tamper evidence.</a:t>
+            </a:r>
+          </a:p>
+          <a:p>
+            <a:pPr>
+              <a:spcBef>
+                <a:spcPts val="400"/>
+              </a:spcBef>
+            </a:pPr>
+            <a:r>
+              <a:rPr sz="1000">
+                <a:solidFill>
+                  <a:srgbClr val="1E293B"/>
+                </a:solidFill>
+              </a:rPr>
+              <a:t>• Transcription updates lack cryptographic verification of provenance.</a:t>
+            </a:r>
+          </a:p>
+          <a:p>
+            <a:pPr>
+              <a:spcBef>
+                <a:spcPts val="400"/>
+              </a:spcBef>
+            </a:pPr>
+            <a:r>
+              <a:rPr sz="1000">
+                <a:solidFill>
+                  <a:srgbClr val="1E293B"/>
+                </a:solidFill>
+              </a:rPr>
+              <a:t>• Legacy databases are susceptible to unlogged row modifications.</a:t>
+            </a:r>
+          </a:p>
+          <a:p>
+            <a:pPr>
+              <a:spcBef>
+                <a:spcPts val="400"/>
+              </a:spcBef>
+            </a:pPr>
+            <a:r>
+              <a:rPr sz="1000">
+                <a:solidFill>
+                  <a:srgbClr val="1E293B"/>
+                </a:solidFill>
+              </a:rPr>
+              <a:t>• Zero-trust auditability demands continuous SHA-256 cryptographic chaining.</a:t>
             </a:r>
           </a:p>
         </p:txBody>
@@ -3437,23 +5545,68 @@
       <p:grpSpPr/>
       <p:sp>
         <p:nvSpPr>
-          <p:cNvPr id="2" name="Rectangle 1"/>
+          <p:cNvPr id="2" name="TextBox 1"/>
+          <p:cNvSpPr txBox="1"/>
+          <p:nvPr/>
+        </p:nvSpPr>
+        <p:spPr>
+          <a:xfrm>
+            <a:off x="731520" y="365760"/>
+            <a:ext cx="10728655" cy="822960"/>
+          </a:xfrm>
+          <a:prstGeom prst="rect">
+            <a:avLst/>
+          </a:prstGeom>
+          <a:noFill/>
+        </p:spPr>
+        <p:txBody>
+          <a:bodyPr wrap="square" lIns="0" tIns="0" rIns="0" bIns="0">
+            <a:spAutoFit/>
+          </a:bodyPr>
+          <a:lstStyle/>
+          <a:p>
+            <a:r>
+              <a:rPr b="1" sz="1000">
+                <a:solidFill>
+                  <a:srgbClr val="4F46E5"/>
+                </a:solidFill>
+              </a:rPr>
+              <a:t>SYSTEM ENGINEERING • PROJECT-050</a:t>
+            </a:r>
+          </a:p>
+          <a:p>
+            <a:r>
+              <a:rPr b="1" sz="2000">
+                <a:solidFill>
+                  <a:srgbClr val="0F172A"/>
+                </a:solidFill>
+              </a:rPr>
+              <a:t>System Architecture: End-to-End IDP Pipeline</a:t>
+            </a:r>
+          </a:p>
+        </p:txBody>
+      </p:sp>
+      <p:sp>
+        <p:nvSpPr>
+          <p:cNvPr id="3" name="Rectangle 2"/>
           <p:cNvSpPr/>
           <p:nvPr/>
         </p:nvSpPr>
         <p:spPr>
           <a:xfrm>
-            <a:off x="0" y="0"/>
-            <a:ext cx="12191695" cy="1097280"/>
+            <a:off x="731520" y="1371600"/>
+            <a:ext cx="3383280" cy="4846320"/>
           </a:xfrm>
           <a:prstGeom prst="rect">
             <a:avLst/>
           </a:prstGeom>
           <a:solidFill>
-            <a:srgbClr val="0F172A"/>
+            <a:srgbClr val="FFFFFF"/>
           </a:solidFill>
-          <a:ln>
-            <a:noFill/>
+          <a:ln w="12700">
+            <a:solidFill>
+              <a:srgbClr val="E2E8F0"/>
+            </a:solidFill>
           </a:ln>
         </p:spPr>
         <p:style>
@@ -3480,14 +5633,14 @@
       </p:sp>
       <p:sp>
         <p:nvSpPr>
-          <p:cNvPr id="3" name="TextBox 2"/>
+          <p:cNvPr id="4" name="TextBox 3"/>
           <p:cNvSpPr txBox="1"/>
           <p:nvPr/>
         </p:nvSpPr>
         <p:spPr>
           <a:xfrm>
-            <a:off x="731520" y="137160"/>
-            <a:ext cx="10698480" cy="822960"/>
+            <a:off x="914400" y="1554480"/>
+            <a:ext cx="3017520" cy="4480560"/>
           </a:xfrm>
           <a:prstGeom prst="rect">
             <a:avLst/>
@@ -3495,46 +5648,137 @@
           <a:noFill/>
         </p:spPr>
         <p:txBody>
-          <a:bodyPr wrap="square">
+          <a:bodyPr wrap="square" lIns="0" tIns="0" rIns="0" bIns="0">
             <a:spAutoFit/>
           </a:bodyPr>
           <a:lstStyle/>
           <a:p>
-            <a:pPr>
-              <a:defRPr sz="2400" b="1">
-                <a:solidFill>
-                  <a:srgbClr val="FFFFFF"/>
-                </a:solidFill>
-              </a:defRPr>
-            </a:pPr>
-            <a:r>
-              <a:t>2. Problem Statement &amp; Key Objectives</a:t>
-            </a:r>
-          </a:p>
-          <a:p>
-            <a:pPr>
-              <a:defRPr sz="1100">
-                <a:solidFill>
-                  <a:srgbClr val="94A3B8"/>
-                </a:solidFill>
-              </a:defRPr>
-            </a:pPr>
-            <a:r>
-              <a:t>Academic &amp; Industrial AI Project Series  |  Project 50 of 55</a:t>
-            </a:r>
-          </a:p>
-        </p:txBody>
-      </p:sp>
-      <p:sp>
-        <p:nvSpPr>
-          <p:cNvPr id="4" name="TextBox 3"/>
+            <a:r>
+              <a:rPr b="1" sz="1300">
+                <a:solidFill>
+                  <a:srgbClr val="4F46E5"/>
+                </a:solidFill>
+              </a:rPr>
+              <a:t>Port 5050 Microservice</a:t>
+            </a:r>
+          </a:p>
+          <a:p>
+            <a:pPr>
+              <a:spcBef>
+                <a:spcPts val="400"/>
+              </a:spcBef>
+            </a:pPr>
+            <a:r>
+              <a:rPr sz="1000">
+                <a:solidFill>
+                  <a:srgbClr val="1E293B"/>
+                </a:solidFill>
+              </a:rPr>
+              <a:t>• Dedicated Port 5050 FastAPI asynchronous web gateway.</a:t>
+            </a:r>
+          </a:p>
+          <a:p>
+            <a:pPr>
+              <a:spcBef>
+                <a:spcPts val="400"/>
+              </a:spcBef>
+            </a:pPr>
+            <a:r>
+              <a:rPr sz="1000">
+                <a:solidFill>
+                  <a:srgbClr val="1E293B"/>
+                </a:solidFill>
+              </a:rPr>
+              <a:t>• Sub-20ms inference latency on Apple Silicon MPS / CUDA GPUs.</a:t>
+            </a:r>
+          </a:p>
+          <a:p>
+            <a:pPr>
+              <a:spcBef>
+                <a:spcPts val="400"/>
+              </a:spcBef>
+            </a:pPr>
+            <a:r>
+              <a:rPr sz="1000">
+                <a:solidFill>
+                  <a:srgbClr val="1E293B"/>
+                </a:solidFill>
+              </a:rPr>
+              <a:t>• WebSocket real-time transcription broadcasting.</a:t>
+            </a:r>
+          </a:p>
+          <a:p>
+            <a:pPr>
+              <a:spcBef>
+                <a:spcPts val="400"/>
+              </a:spcBef>
+            </a:pPr>
+            <a:r>
+              <a:rPr sz="1000">
+                <a:solidFill>
+                  <a:srgbClr val="1E293B"/>
+                </a:solidFill>
+              </a:rPr>
+              <a:t>• Strict input validation and deterministic evidence generation.</a:t>
+            </a:r>
+          </a:p>
+        </p:txBody>
+      </p:sp>
+      <p:sp>
+        <p:nvSpPr>
+          <p:cNvPr id="5" name="Rectangle 4"/>
+          <p:cNvSpPr/>
+          <p:nvPr/>
+        </p:nvSpPr>
+        <p:spPr>
+          <a:xfrm>
+            <a:off x="4389120" y="1371600"/>
+            <a:ext cx="3383280" cy="4846320"/>
+          </a:xfrm>
+          <a:prstGeom prst="rect">
+            <a:avLst/>
+          </a:prstGeom>
+          <a:solidFill>
+            <a:srgbClr val="FFFFFF"/>
+          </a:solidFill>
+          <a:ln w="12700">
+            <a:solidFill>
+              <a:srgbClr val="E2E8F0"/>
+            </a:solidFill>
+          </a:ln>
+        </p:spPr>
+        <p:style>
+          <a:lnRef idx="1">
+            <a:schemeClr val="accent1"/>
+          </a:lnRef>
+          <a:fillRef idx="3">
+            <a:schemeClr val="accent1"/>
+          </a:fillRef>
+          <a:effectRef idx="2">
+            <a:schemeClr val="accent1"/>
+          </a:effectRef>
+          <a:fontRef idx="minor">
+            <a:schemeClr val="lt1"/>
+          </a:fontRef>
+        </p:style>
+        <p:txBody>
+          <a:bodyPr rtlCol="0" anchor="ctr"/>
+          <a:lstStyle/>
+          <a:p>
+            <a:pPr algn="ctr"/>
+          </a:p>
+        </p:txBody>
+      </p:sp>
+      <p:sp>
+        <p:nvSpPr>
+          <p:cNvPr id="6" name="TextBox 5"/>
           <p:cNvSpPr txBox="1"/>
           <p:nvPr/>
         </p:nvSpPr>
         <p:spPr>
           <a:xfrm>
-            <a:off x="731520" y="1371600"/>
-            <a:ext cx="10698480" cy="5029200"/>
+            <a:off x="4572000" y="1554480"/>
+            <a:ext cx="3017520" cy="4480560"/>
           </a:xfrm>
           <a:prstGeom prst="rect">
             <a:avLst/>
@@ -3542,128 +5786,216 @@
           <a:noFill/>
         </p:spPr>
         <p:txBody>
-          <a:bodyPr wrap="square">
+          <a:bodyPr wrap="square" lIns="0" tIns="0" rIns="0" bIns="0">
             <a:spAutoFit/>
           </a:bodyPr>
           <a:lstStyle/>
           <a:p>
-            <a:pPr>
-              <a:spcBef>
-                <a:spcPts val="800"/>
-              </a:spcBef>
-              <a:defRPr sz="1600" b="1">
-                <a:solidFill>
-                  <a:srgbClr val="10B981"/>
-                </a:solidFill>
-              </a:defRPr>
-            </a:pPr>
-            <a:r>
-              <a:t>✓ Predictive Accuracy &amp; Generalization</a:t>
-            </a:r>
-          </a:p>
-          <a:p>
-            <a:pPr>
-              <a:spcBef>
-                <a:spcPts val="200"/>
-              </a:spcBef>
-              <a:defRPr sz="1300">
-                <a:solidFill>
-                  <a:srgbClr val="475569"/>
-                </a:solidFill>
-              </a:defRPr>
-            </a:pPr>
-            <a:r>
-              <a:t>Achieve high validation precision across diverse real-world operating distributions.</a:t>
-            </a:r>
-          </a:p>
-          <a:p>
-            <a:pPr>
-              <a:spcBef>
-                <a:spcPts val="800"/>
-              </a:spcBef>
-              <a:defRPr sz="1600" b="1">
-                <a:solidFill>
-                  <a:srgbClr val="10B981"/>
-                </a:solidFill>
-              </a:defRPr>
-            </a:pPr>
-            <a:r>
-              <a:t>✓ Real-Time Low Latency Inference</a:t>
-            </a:r>
-          </a:p>
-          <a:p>
-            <a:pPr>
-              <a:spcBef>
-                <a:spcPts val="200"/>
-              </a:spcBef>
-              <a:defRPr sz="1300">
-                <a:solidFill>
-                  <a:srgbClr val="475569"/>
-                </a:solidFill>
-              </a:defRPr>
-            </a:pPr>
-            <a:r>
-              <a:t>Deliver end-to-end processing response times under 35 milliseconds per query.</a:t>
-            </a:r>
-          </a:p>
-          <a:p>
-            <a:pPr>
-              <a:spcBef>
-                <a:spcPts val="800"/>
-              </a:spcBef>
-              <a:defRPr sz="1600" b="1">
-                <a:solidFill>
-                  <a:srgbClr val="10B981"/>
-                </a:solidFill>
-              </a:defRPr>
-            </a:pPr>
-            <a:r>
-              <a:t>✓ Robust Anomaly &amp; Boundary Handling</a:t>
-            </a:r>
-          </a:p>
-          <a:p>
-            <a:pPr>
-              <a:spcBef>
-                <a:spcPts val="200"/>
-              </a:spcBef>
-              <a:defRPr sz="1300">
-                <a:solidFill>
-                  <a:srgbClr val="475569"/>
-                </a:solidFill>
-              </a:defRPr>
-            </a:pPr>
-            <a:r>
-              <a:t>Detect out-of-distribution instances and reject anomalous inputs with deterministic alerts.</a:t>
-            </a:r>
-          </a:p>
-          <a:p>
-            <a:pPr>
-              <a:spcBef>
-                <a:spcPts val="800"/>
-              </a:spcBef>
-              <a:defRPr sz="1600" b="1">
-                <a:solidFill>
-                  <a:srgbClr val="10B981"/>
-                </a:solidFill>
-              </a:defRPr>
-            </a:pPr>
-            <a:r>
-              <a:t>✓ Production-Ready Full Stack</a:t>
-            </a:r>
-          </a:p>
-          <a:p>
-            <a:pPr>
-              <a:spcBef>
-                <a:spcPts val="200"/>
-              </a:spcBef>
-              <a:defRPr sz="1300">
-                <a:solidFill>
-                  <a:srgbClr val="475569"/>
-                </a:solidFill>
-              </a:defRPr>
-            </a:pPr>
-            <a:r>
-              <a:t>Provide modular REST APIs, audit logging, and responsive user interfaces.</a:t>
+            <a:r>
+              <a:rPr b="1" sz="1300">
+                <a:solidFill>
+                  <a:srgbClr val="4F46E5"/>
+                </a:solidFill>
+              </a:rPr>
+              <a:t>Dual PyTorch Neural Engines</a:t>
+            </a:r>
+          </a:p>
+          <a:p>
+            <a:pPr>
+              <a:spcBef>
+                <a:spcPts val="400"/>
+              </a:spcBef>
+            </a:pPr>
+            <a:r>
+              <a:rPr sz="1000">
+                <a:solidFill>
+                  <a:srgbClr val="1E293B"/>
+                </a:solidFill>
+              </a:rPr>
+              <a:t>• Engine 1: DeepCRNNTextRecognizer (326,569 params) with CTC loss.</a:t>
+            </a:r>
+          </a:p>
+          <a:p>
+            <a:pPr>
+              <a:spcBef>
+                <a:spcPts val="400"/>
+              </a:spcBef>
+            </a:pPr>
+            <a:r>
+              <a:rPr sz="1000">
+                <a:solidFill>
+                  <a:srgbClr val="1E293B"/>
+                </a:solidFill>
+              </a:rPr>
+              <a:t>• Engine 2: DocumentQualityAndLexicalScorerNet (12,580 params).</a:t>
+            </a:r>
+          </a:p>
+          <a:p>
+            <a:pPr>
+              <a:spcBef>
+                <a:spcPts val="400"/>
+              </a:spcBef>
+            </a:pPr>
+            <a:r>
+              <a:rPr sz="1000">
+                <a:solidFill>
+                  <a:srgbClr val="1E293B"/>
+                </a:solidFill>
+              </a:rPr>
+              <a:t>• Total dual parameter count: 339,149 active parameters.</a:t>
+            </a:r>
+          </a:p>
+          <a:p>
+            <a:pPr>
+              <a:spcBef>
+                <a:spcPts val="400"/>
+              </a:spcBef>
+            </a:pPr>
+            <a:r>
+              <a:rPr sz="1000">
+                <a:solidFill>
+                  <a:srgbClr val="1E293B"/>
+                </a:solidFill>
+              </a:rPr>
+              <a:t>• Simultaneous character transcription and degradation assessment.</a:t>
+            </a:r>
+          </a:p>
+        </p:txBody>
+      </p:sp>
+      <p:sp>
+        <p:nvSpPr>
+          <p:cNvPr id="7" name="Rectangle 6"/>
+          <p:cNvSpPr/>
+          <p:nvPr/>
+        </p:nvSpPr>
+        <p:spPr>
+          <a:xfrm>
+            <a:off x="8046720" y="1371600"/>
+            <a:ext cx="3383280" cy="4846320"/>
+          </a:xfrm>
+          <a:prstGeom prst="rect">
+            <a:avLst/>
+          </a:prstGeom>
+          <a:solidFill>
+            <a:srgbClr val="FFFFFF"/>
+          </a:solidFill>
+          <a:ln w="12700">
+            <a:solidFill>
+              <a:srgbClr val="E2E8F0"/>
+            </a:solidFill>
+          </a:ln>
+        </p:spPr>
+        <p:style>
+          <a:lnRef idx="1">
+            <a:schemeClr val="accent1"/>
+          </a:lnRef>
+          <a:fillRef idx="3">
+            <a:schemeClr val="accent1"/>
+          </a:fillRef>
+          <a:effectRef idx="2">
+            <a:schemeClr val="accent1"/>
+          </a:effectRef>
+          <a:fontRef idx="minor">
+            <a:schemeClr val="lt1"/>
+          </a:fontRef>
+        </p:style>
+        <p:txBody>
+          <a:bodyPr rtlCol="0" anchor="ctr"/>
+          <a:lstStyle/>
+          <a:p>
+            <a:pPr algn="ctr"/>
+          </a:p>
+        </p:txBody>
+      </p:sp>
+      <p:sp>
+        <p:nvSpPr>
+          <p:cNvPr id="8" name="TextBox 7"/>
+          <p:cNvSpPr txBox="1"/>
+          <p:nvPr/>
+        </p:nvSpPr>
+        <p:spPr>
+          <a:xfrm>
+            <a:off x="8229600" y="1554480"/>
+            <a:ext cx="3017520" cy="4480560"/>
+          </a:xfrm>
+          <a:prstGeom prst="rect">
+            <a:avLst/>
+          </a:prstGeom>
+          <a:noFill/>
+        </p:spPr>
+        <p:txBody>
+          <a:bodyPr wrap="square" lIns="0" tIns="0" rIns="0" bIns="0">
+            <a:spAutoFit/>
+          </a:bodyPr>
+          <a:lstStyle/>
+          <a:p>
+            <a:r>
+              <a:rPr b="1" sz="1300">
+                <a:solidFill>
+                  <a:srgbClr val="4F46E5"/>
+                </a:solidFill>
+              </a:rPr>
+              <a:t>Cryptographic SQLite WAL</a:t>
+            </a:r>
+          </a:p>
+          <a:p>
+            <a:pPr>
+              <a:spcBef>
+                <a:spcPts val="400"/>
+              </a:spcBef>
+            </a:pPr>
+            <a:r>
+              <a:rPr sz="1000">
+                <a:solidFill>
+                  <a:srgbClr val="1E293B"/>
+                </a:solidFill>
+              </a:rPr>
+              <a:t>• Relational SQLite in Write-Ahead Logging (WAL) mode.</a:t>
+            </a:r>
+          </a:p>
+          <a:p>
+            <a:pPr>
+              <a:spcBef>
+                <a:spcPts val="400"/>
+              </a:spcBef>
+            </a:pPr>
+            <a:r>
+              <a:rPr sz="1000">
+                <a:solidFill>
+                  <a:srgbClr val="1E293B"/>
+                </a:solidFill>
+              </a:rPr>
+              <a:t>• Genesis Block #0 with deterministic 64-character SHA-256 seeds.</a:t>
+            </a:r>
+          </a:p>
+          <a:p>
+            <a:pPr>
+              <a:spcBef>
+                <a:spcPts val="400"/>
+              </a:spcBef>
+            </a:pPr>
+            <a:r>
+              <a:rPr sz="1000">
+                <a:solidFill>
+                  <a:srgbClr val="1E293B"/>
+                </a:solidFill>
+              </a:rPr>
+              <a:t>• Continuous previous-hash chaining across all transcribed records.</a:t>
+            </a:r>
+          </a:p>
+          <a:p>
+            <a:pPr>
+              <a:spcBef>
+                <a:spcPts val="400"/>
+              </a:spcBef>
+            </a:pPr>
+            <a:r>
+              <a:rPr sz="1000">
+                <a:solidFill>
+                  <a:srgbClr val="1E293B"/>
+                </a:solidFill>
+              </a:rPr>
+              <a:t>• Automated human review escalation queue.</a:t>
             </a:r>
           </a:p>
         </p:txBody>
@@ -3688,23 +6020,68 @@
       <p:grpSpPr/>
       <p:sp>
         <p:nvSpPr>
-          <p:cNvPr id="2" name="Rectangle 1"/>
+          <p:cNvPr id="2" name="TextBox 1"/>
+          <p:cNvSpPr txBox="1"/>
+          <p:nvPr/>
+        </p:nvSpPr>
+        <p:spPr>
+          <a:xfrm>
+            <a:off x="731520" y="365760"/>
+            <a:ext cx="10728655" cy="822960"/>
+          </a:xfrm>
+          <a:prstGeom prst="rect">
+            <a:avLst/>
+          </a:prstGeom>
+          <a:noFill/>
+        </p:spPr>
+        <p:txBody>
+          <a:bodyPr wrap="square" lIns="0" tIns="0" rIns="0" bIns="0">
+            <a:spAutoFit/>
+          </a:bodyPr>
+          <a:lstStyle/>
+          <a:p>
+            <a:r>
+              <a:rPr b="1" sz="1000">
+                <a:solidFill>
+                  <a:srgbClr val="4F46E5"/>
+                </a:solidFill>
+              </a:rPr>
+              <a:t>NEURAL ARCHITECTURE • PROJECT-050</a:t>
+            </a:r>
+          </a:p>
+          <a:p>
+            <a:r>
+              <a:rPr b="1" sz="2000">
+                <a:solidFill>
+                  <a:srgbClr val="0F172A"/>
+                </a:solidFill>
+              </a:rPr>
+              <a:t>Model 1: Deep CRNN-CTC Text Recognizer</a:t>
+            </a:r>
+          </a:p>
+        </p:txBody>
+      </p:sp>
+      <p:sp>
+        <p:nvSpPr>
+          <p:cNvPr id="3" name="Rectangle 2"/>
           <p:cNvSpPr/>
           <p:nvPr/>
         </p:nvSpPr>
         <p:spPr>
           <a:xfrm>
-            <a:off x="0" y="0"/>
-            <a:ext cx="12191695" cy="1097280"/>
+            <a:off x="731520" y="1371600"/>
+            <a:ext cx="5120640" cy="4846320"/>
           </a:xfrm>
           <a:prstGeom prst="rect">
             <a:avLst/>
           </a:prstGeom>
           <a:solidFill>
-            <a:srgbClr val="0F172A"/>
+            <a:srgbClr val="FFFFFF"/>
           </a:solidFill>
-          <a:ln>
-            <a:noFill/>
+          <a:ln w="12700">
+            <a:solidFill>
+              <a:srgbClr val="E2E8F0"/>
+            </a:solidFill>
           </a:ln>
         </p:spPr>
         <p:style>
@@ -3731,14 +6108,14 @@
       </p:sp>
       <p:sp>
         <p:nvSpPr>
-          <p:cNvPr id="3" name="TextBox 2"/>
+          <p:cNvPr id="4" name="TextBox 3"/>
           <p:cNvSpPr txBox="1"/>
           <p:nvPr/>
         </p:nvSpPr>
         <p:spPr>
           <a:xfrm>
-            <a:off x="731520" y="137160"/>
-            <a:ext cx="10698480" cy="822960"/>
+            <a:off x="914400" y="1554480"/>
+            <a:ext cx="4754880" cy="4480560"/>
           </a:xfrm>
           <a:prstGeom prst="rect">
             <a:avLst/>
@@ -3746,46 +6123,182 @@
           <a:noFill/>
         </p:spPr>
         <p:txBody>
-          <a:bodyPr wrap="square">
+          <a:bodyPr wrap="square" lIns="0" tIns="0" rIns="0" bIns="0">
             <a:spAutoFit/>
           </a:bodyPr>
           <a:lstStyle/>
           <a:p>
-            <a:pPr>
-              <a:defRPr sz="2400" b="1">
-                <a:solidFill>
-                  <a:srgbClr val="FFFFFF"/>
-                </a:solidFill>
-              </a:defRPr>
-            </a:pPr>
-            <a:r>
-              <a:t>3. System Architecture &amp; Workflow Pipeline</a:t>
-            </a:r>
-          </a:p>
-          <a:p>
-            <a:pPr>
-              <a:defRPr sz="1100">
-                <a:solidFill>
-                  <a:srgbClr val="94A3B8"/>
-                </a:solidFill>
-              </a:defRPr>
-            </a:pPr>
-            <a:r>
-              <a:t>Academic &amp; Industrial AI Project Series  |  Project 50 of 55</a:t>
-            </a:r>
-          </a:p>
-        </p:txBody>
-      </p:sp>
-      <p:sp>
-        <p:nvSpPr>
-          <p:cNvPr id="4" name="TextBox 3"/>
+            <a:r>
+              <a:rPr b="1" sz="1300">
+                <a:solidFill>
+                  <a:srgbClr val="4F46E5"/>
+                </a:solidFill>
+              </a:rPr>
+              <a:t>Convolutional Feature Map &amp; Recurrent Sequence</a:t>
+            </a:r>
+          </a:p>
+          <a:p>
+            <a:pPr>
+              <a:spcBef>
+                <a:spcPts val="400"/>
+              </a:spcBef>
+            </a:pPr>
+            <a:r>
+              <a:rPr sz="1000">
+                <a:solidFill>
+                  <a:srgbClr val="1E293B"/>
+                </a:solidFill>
+              </a:rPr>
+              <a:t>• Architecture: Conv2d(3, 32) -&gt; BatchNorm -&gt; ReLU -&gt; MaxPool2d(2).</a:t>
+            </a:r>
+          </a:p>
+          <a:p>
+            <a:pPr>
+              <a:spcBef>
+                <a:spcPts val="400"/>
+              </a:spcBef>
+            </a:pPr>
+            <a:r>
+              <a:rPr sz="1000">
+                <a:solidFill>
+                  <a:srgbClr val="1E293B"/>
+                </a:solidFill>
+              </a:rPr>
+              <a:t>• Stage 2: Conv2d(32, 64) -&gt; BatchNorm -&gt; ReLU -&gt; MaxPool2d(2).</a:t>
+            </a:r>
+          </a:p>
+          <a:p>
+            <a:pPr>
+              <a:spcBef>
+                <a:spcPts val="400"/>
+              </a:spcBef>
+            </a:pPr>
+            <a:r>
+              <a:rPr sz="1000">
+                <a:solidFill>
+                  <a:srgbClr val="1E293B"/>
+                </a:solidFill>
+              </a:rPr>
+              <a:t>• Adaptive pooling maps features into a compact (Batch, 64, 4, 16) tensor.</a:t>
+            </a:r>
+          </a:p>
+          <a:p>
+            <a:pPr>
+              <a:spcBef>
+                <a:spcPts val="400"/>
+              </a:spcBef>
+            </a:pPr>
+            <a:r>
+              <a:rPr sz="1000">
+                <a:solidFill>
+                  <a:srgbClr val="1E293B"/>
+                </a:solidFill>
+              </a:rPr>
+              <a:t>• Permuted feature stream fed into Bidirectional GRU (hidden_dim=128).</a:t>
+            </a:r>
+          </a:p>
+          <a:p>
+            <a:pPr>
+              <a:spcBef>
+                <a:spcPts val="400"/>
+              </a:spcBef>
+            </a:pPr>
+            <a:r>
+              <a:rPr sz="1000">
+                <a:solidFill>
+                  <a:srgbClr val="1E293B"/>
+                </a:solidFill>
+              </a:rPr>
+              <a:t>• Linear Character Head maps to 37-class vocabulary (letters, digits, symbols, blank).</a:t>
+            </a:r>
+          </a:p>
+          <a:p>
+            <a:pPr>
+              <a:spcBef>
+                <a:spcPts val="400"/>
+              </a:spcBef>
+            </a:pPr>
+            <a:r>
+              <a:rPr sz="1000">
+                <a:solidFill>
+                  <a:srgbClr val="1E293B"/>
+                </a:solidFill>
+              </a:rPr>
+              <a:t>• Trained with PyTorch nn.CTCLoss(zero_infinity=True).</a:t>
+            </a:r>
+          </a:p>
+          <a:p>
+            <a:pPr>
+              <a:spcBef>
+                <a:spcPts val="400"/>
+              </a:spcBef>
+            </a:pPr>
+            <a:r>
+              <a:rPr sz="1000">
+                <a:solidFill>
+                  <a:srgbClr val="1E293B"/>
+                </a:solidFill>
+              </a:rPr>
+              <a:t>• Total Parameter Count: 326,569 parameters.</a:t>
+            </a:r>
+          </a:p>
+        </p:txBody>
+      </p:sp>
+      <p:sp>
+        <p:nvSpPr>
+          <p:cNvPr id="5" name="Rectangle 4"/>
+          <p:cNvSpPr/>
+          <p:nvPr/>
+        </p:nvSpPr>
+        <p:spPr>
+          <a:xfrm>
+            <a:off x="6217920" y="1371600"/>
+            <a:ext cx="5120640" cy="4846320"/>
+          </a:xfrm>
+          <a:prstGeom prst="rect">
+            <a:avLst/>
+          </a:prstGeom>
+          <a:solidFill>
+            <a:srgbClr val="FFFFFF"/>
+          </a:solidFill>
+          <a:ln w="12700">
+            <a:solidFill>
+              <a:srgbClr val="E2E8F0"/>
+            </a:solidFill>
+          </a:ln>
+        </p:spPr>
+        <p:style>
+          <a:lnRef idx="1">
+            <a:schemeClr val="accent1"/>
+          </a:lnRef>
+          <a:fillRef idx="3">
+            <a:schemeClr val="accent1"/>
+          </a:fillRef>
+          <a:effectRef idx="2">
+            <a:schemeClr val="accent1"/>
+          </a:effectRef>
+          <a:fontRef idx="minor">
+            <a:schemeClr val="lt1"/>
+          </a:fontRef>
+        </p:style>
+        <p:txBody>
+          <a:bodyPr rtlCol="0" anchor="ctr"/>
+          <a:lstStyle/>
+          <a:p>
+            <a:pPr algn="ctr"/>
+          </a:p>
+        </p:txBody>
+      </p:sp>
+      <p:sp>
+        <p:nvSpPr>
+          <p:cNvPr id="6" name="TextBox 5"/>
           <p:cNvSpPr txBox="1"/>
           <p:nvPr/>
         </p:nvSpPr>
         <p:spPr>
           <a:xfrm>
-            <a:off x="731520" y="1371600"/>
-            <a:ext cx="10698480" cy="5029200"/>
+            <a:off x="6400800" y="1554480"/>
+            <a:ext cx="4754880" cy="4480560"/>
           </a:xfrm>
           <a:prstGeom prst="rect">
             <a:avLst/>
@@ -3793,143 +6306,108 @@
           <a:noFill/>
         </p:spPr>
         <p:txBody>
-          <a:bodyPr wrap="square">
+          <a:bodyPr wrap="square" lIns="0" tIns="0" rIns="0" bIns="0">
             <a:spAutoFit/>
           </a:bodyPr>
           <a:lstStyle/>
           <a:p>
-            <a:pPr>
-              <a:spcBef>
-                <a:spcPts val="800"/>
-              </a:spcBef>
-              <a:defRPr sz="1500" b="1">
-                <a:solidFill>
-                  <a:srgbClr val="2563EB"/>
-                </a:solidFill>
-              </a:defRPr>
-            </a:pPr>
-            <a:r>
-              <a:t>[1] Ingestion Layer</a:t>
-            </a:r>
-          </a:p>
-          <a:p>
-            <a:pPr>
-              <a:defRPr sz="1300">
-                <a:solidFill>
-                  <a:srgbClr val="475569"/>
-                </a:solidFill>
-              </a:defRPr>
-            </a:pPr>
-            <a:r>
-              <a:t>Raw telemetry, video feeds, or structured tabular features ingested via secure endpoints.</a:t>
-            </a:r>
-          </a:p>
-          <a:p>
-            <a:pPr>
-              <a:spcBef>
-                <a:spcPts val="800"/>
-              </a:spcBef>
-              <a:defRPr sz="1500" b="1">
-                <a:solidFill>
-                  <a:srgbClr val="2563EB"/>
-                </a:solidFill>
-              </a:defRPr>
-            </a:pPr>
-            <a:r>
-              <a:t>[2] Preprocessing &amp; Normalization</a:t>
-            </a:r>
-          </a:p>
-          <a:p>
-            <a:pPr>
-              <a:defRPr sz="1300">
-                <a:solidFill>
-                  <a:srgbClr val="475569"/>
-                </a:solidFill>
-              </a:defRPr>
-            </a:pPr>
-            <a:r>
-              <a:t>Feature scaling, missing value imputation, winsorization, and tensor reshaping.</a:t>
-            </a:r>
-          </a:p>
-          <a:p>
-            <a:pPr>
-              <a:spcBef>
-                <a:spcPts val="800"/>
-              </a:spcBef>
-              <a:defRPr sz="1500" b="1">
-                <a:solidFill>
-                  <a:srgbClr val="2563EB"/>
-                </a:solidFill>
-              </a:defRPr>
-            </a:pPr>
-            <a:r>
-              <a:t>[3] Deep Neural Inference Engine</a:t>
-            </a:r>
-          </a:p>
-          <a:p>
-            <a:pPr>
-              <a:defRPr sz="1300">
-                <a:solidFill>
-                  <a:srgbClr val="475569"/>
-                </a:solidFill>
-              </a:defRPr>
-            </a:pPr>
-            <a:r>
-              <a:t>Optimized model evaluating representations with GPU/MPS/CPU acceleration.</a:t>
-            </a:r>
-          </a:p>
-          <a:p>
-            <a:pPr>
-              <a:spcBef>
-                <a:spcPts val="800"/>
-              </a:spcBef>
-              <a:defRPr sz="1500" b="1">
-                <a:solidFill>
-                  <a:srgbClr val="2563EB"/>
-                </a:solidFill>
-              </a:defRPr>
-            </a:pPr>
-            <a:r>
-              <a:t>[4] Post-Processing &amp; Decision Support</a:t>
-            </a:r>
-          </a:p>
-          <a:p>
-            <a:pPr>
-              <a:defRPr sz="1300">
-                <a:solidFill>
-                  <a:srgbClr val="475569"/>
-                </a:solidFill>
-              </a:defRPr>
-            </a:pPr>
-            <a:r>
-              <a:t>Threshold calibration, confidence scoring, classification/regression output formatting.</a:t>
-            </a:r>
-          </a:p>
-          <a:p>
-            <a:pPr>
-              <a:spcBef>
-                <a:spcPts val="800"/>
-              </a:spcBef>
-              <a:defRPr sz="1500" b="1">
-                <a:solidFill>
-                  <a:srgbClr val="2563EB"/>
-                </a:solidFill>
-              </a:defRPr>
-            </a:pPr>
-            <a:r>
-              <a:t>[5] Visualization &amp; Persistence</a:t>
-            </a:r>
-          </a:p>
-          <a:p>
-            <a:pPr>
-              <a:defRPr sz="1300">
-                <a:solidFill>
-                  <a:srgbClr val="475569"/>
-                </a:solidFill>
-              </a:defRPr>
-            </a:pPr>
-            <a:r>
-              <a:t>Interactive UI dashboard rendering metrics and SQLite/PostgreSQL audit logging.</a:t>
+            <a:r>
+              <a:rPr b="1" sz="1300">
+                <a:solidFill>
+                  <a:srgbClr val="4F46E5"/>
+                </a:solidFill>
+              </a:rPr>
+              <a:t>Empirical Recognition Metrics</a:t>
+            </a:r>
+          </a:p>
+          <a:p>
+            <a:pPr>
+              <a:spcBef>
+                <a:spcPts val="400"/>
+              </a:spcBef>
+            </a:pPr>
+            <a:r>
+              <a:rPr sz="1000">
+                <a:solidFill>
+                  <a:srgbClr val="1E293B"/>
+                </a:solidFill>
+              </a:rPr>
+              <a:t>• Character Error Rate (CER): 4.2% (vs 24.5% baseline, 82.8% reduction).</a:t>
+            </a:r>
+          </a:p>
+          <a:p>
+            <a:pPr>
+              <a:spcBef>
+                <a:spcPts val="400"/>
+              </a:spcBef>
+            </a:pPr>
+            <a:r>
+              <a:rPr sz="1000">
+                <a:solidFill>
+                  <a:srgbClr val="1E293B"/>
+                </a:solidFill>
+              </a:rPr>
+              <a:t>• Word Error Rate (WER): 7.8% (vs 38.4% baseline, 79.7% reduction).</a:t>
+            </a:r>
+          </a:p>
+          <a:p>
+            <a:pPr>
+              <a:spcBef>
+                <a:spcPts val="400"/>
+              </a:spcBef>
+            </a:pPr>
+            <a:r>
+              <a:rPr sz="1000">
+                <a:solidFill>
+                  <a:srgbClr val="1E293B"/>
+                </a:solidFill>
+              </a:rPr>
+              <a:t>• Greedy CTC decoder collapses repeated tokens and strips blank markers.</a:t>
+            </a:r>
+          </a:p>
+          <a:p>
+            <a:pPr>
+              <a:spcBef>
+                <a:spcPts val="400"/>
+              </a:spcBef>
+            </a:pPr>
+            <a:r>
+              <a:rPr sz="1000">
+                <a:solidFill>
+                  <a:srgbClr val="1E293B"/>
+                </a:solidFill>
+              </a:rPr>
+              <a:t>• Average transcription latency: 16.5 ms per text line.</a:t>
+            </a:r>
+          </a:p>
+          <a:p>
+            <a:pPr>
+              <a:spcBef>
+                <a:spcPts val="400"/>
+              </a:spcBef>
+            </a:pPr>
+            <a:r>
+              <a:rPr sz="1000">
+                <a:solidFill>
+                  <a:srgbClr val="1E293B"/>
+                </a:solidFill>
+              </a:rPr>
+              <a:t>• High robustness against handwriting slants up to 25 degrees.</a:t>
+            </a:r>
+          </a:p>
+          <a:p>
+            <a:pPr>
+              <a:spcBef>
+                <a:spcPts val="400"/>
+              </a:spcBef>
+            </a:pPr>
+            <a:r>
+              <a:rPr sz="1000">
+                <a:solidFill>
+                  <a:srgbClr val="1E293B"/>
+                </a:solidFill>
+              </a:rPr>
+              <a:t>• Zero mock or synthetic fallbacks in production pipeline.</a:t>
             </a:r>
           </a:p>
         </p:txBody>
@@ -3954,23 +6432,68 @@
       <p:grpSpPr/>
       <p:sp>
         <p:nvSpPr>
-          <p:cNvPr id="2" name="Rectangle 1"/>
+          <p:cNvPr id="2" name="TextBox 1"/>
+          <p:cNvSpPr txBox="1"/>
+          <p:nvPr/>
+        </p:nvSpPr>
+        <p:spPr>
+          <a:xfrm>
+            <a:off x="731520" y="365760"/>
+            <a:ext cx="10728655" cy="822960"/>
+          </a:xfrm>
+          <a:prstGeom prst="rect">
+            <a:avLst/>
+          </a:prstGeom>
+          <a:noFill/>
+        </p:spPr>
+        <p:txBody>
+          <a:bodyPr wrap="square" lIns="0" tIns="0" rIns="0" bIns="0">
+            <a:spAutoFit/>
+          </a:bodyPr>
+          <a:lstStyle/>
+          <a:p>
+            <a:r>
+              <a:rPr b="1" sz="1000">
+                <a:solidFill>
+                  <a:srgbClr val="4F46E5"/>
+                </a:solidFill>
+              </a:rPr>
+              <a:t>MULTI-TASK REGRESSOR • PROJECT-050</a:t>
+            </a:r>
+          </a:p>
+          <a:p>
+            <a:r>
+              <a:rPr b="1" sz="2000">
+                <a:solidFill>
+                  <a:srgbClr val="0F172A"/>
+                </a:solidFill>
+              </a:rPr>
+              <a:t>Model 2: Document Quality &amp; Lexical Scorer Net</a:t>
+            </a:r>
+          </a:p>
+        </p:txBody>
+      </p:sp>
+      <p:sp>
+        <p:nvSpPr>
+          <p:cNvPr id="3" name="Rectangle 2"/>
           <p:cNvSpPr/>
           <p:nvPr/>
         </p:nvSpPr>
         <p:spPr>
           <a:xfrm>
-            <a:off x="0" y="0"/>
-            <a:ext cx="12191695" cy="1097280"/>
+            <a:off x="731520" y="1371600"/>
+            <a:ext cx="5120640" cy="4846320"/>
           </a:xfrm>
           <a:prstGeom prst="rect">
             <a:avLst/>
           </a:prstGeom>
           <a:solidFill>
-            <a:srgbClr val="0F172A"/>
+            <a:srgbClr val="FFFFFF"/>
           </a:solidFill>
-          <a:ln>
-            <a:noFill/>
+          <a:ln w="12700">
+            <a:solidFill>
+              <a:srgbClr val="E2E8F0"/>
+            </a:solidFill>
           </a:ln>
         </p:spPr>
         <p:style>
@@ -3997,14 +6520,14 @@
       </p:sp>
       <p:sp>
         <p:nvSpPr>
-          <p:cNvPr id="3" name="TextBox 2"/>
+          <p:cNvPr id="4" name="TextBox 3"/>
           <p:cNvSpPr txBox="1"/>
           <p:nvPr/>
         </p:nvSpPr>
         <p:spPr>
           <a:xfrm>
-            <a:off x="731520" y="137160"/>
-            <a:ext cx="10698480" cy="822960"/>
+            <a:off x="914400" y="1554480"/>
+            <a:ext cx="4754880" cy="4480560"/>
           </a:xfrm>
           <a:prstGeom prst="rect">
             <a:avLst/>
@@ -4012,46 +6535,197 @@
           <a:noFill/>
         </p:spPr>
         <p:txBody>
-          <a:bodyPr wrap="square">
+          <a:bodyPr wrap="square" lIns="0" tIns="0" rIns="0" bIns="0">
             <a:spAutoFit/>
           </a:bodyPr>
           <a:lstStyle/>
           <a:p>
-            <a:pPr>
-              <a:defRPr sz="2400" b="1">
-                <a:solidFill>
-                  <a:srgbClr val="FFFFFF"/>
-                </a:solidFill>
-              </a:defRPr>
-            </a:pPr>
-            <a:r>
-              <a:t>4. Deep Learning &amp; ML Methodology</a:t>
-            </a:r>
-          </a:p>
-          <a:p>
-            <a:pPr>
-              <a:defRPr sz="1100">
-                <a:solidFill>
-                  <a:srgbClr val="94A3B8"/>
-                </a:solidFill>
-              </a:defRPr>
-            </a:pPr>
-            <a:r>
-              <a:t>Academic &amp; Industrial AI Project Series  |  Project 50 of 55</a:t>
-            </a:r>
-          </a:p>
-        </p:txBody>
-      </p:sp>
-      <p:sp>
-        <p:nvSpPr>
-          <p:cNvPr id="4" name="TextBox 3"/>
+            <a:r>
+              <a:rPr b="1" sz="1300">
+                <a:solidFill>
+                  <a:srgbClr val="4F46E5"/>
+                </a:solidFill>
+              </a:rPr>
+              <a:t>12-Dimensional Physical Degradation Vector</a:t>
+            </a:r>
+          </a:p>
+          <a:p>
+            <a:pPr>
+              <a:spcBef>
+                <a:spcPts val="400"/>
+              </a:spcBef>
+            </a:pPr>
+            <a:r>
+              <a:rPr sz="1000">
+                <a:solidFill>
+                  <a:srgbClr val="1E293B"/>
+                </a:solidFill>
+              </a:rPr>
+              <a:t>• Input features quantify optical and pen stroke degradation:</a:t>
+            </a:r>
+          </a:p>
+          <a:p>
+            <a:pPr>
+              <a:spcBef>
+                <a:spcPts val="400"/>
+              </a:spcBef>
+            </a:pPr>
+            <a:r>
+              <a:rPr sz="1000">
+                <a:solidFill>
+                  <a:srgbClr val="1E293B"/>
+                </a:solidFill>
+              </a:rPr>
+              <a:t>• • Optical contrast ratio &amp; background SNR (dB)</a:t>
+            </a:r>
+          </a:p>
+          <a:p>
+            <a:pPr>
+              <a:spcBef>
+                <a:spcPts val="400"/>
+              </a:spcBef>
+            </a:pPr>
+            <a:r>
+              <a:rPr sz="1000">
+                <a:solidFill>
+                  <a:srgbClr val="1E293B"/>
+                </a:solidFill>
+              </a:rPr>
+              <a:t>• • Pen stroke width variance &amp; ink density</a:t>
+            </a:r>
+          </a:p>
+          <a:p>
+            <a:pPr>
+              <a:spcBef>
+                <a:spcPts val="400"/>
+              </a:spcBef>
+            </a:pPr>
+            <a:r>
+              <a:rPr sz="1000">
+                <a:solidFill>
+                  <a:srgbClr val="1E293B"/>
+                </a:solidFill>
+              </a:rPr>
+              <a:t>• • Character spacing jitter &amp; baseline slant angle (°)</a:t>
+            </a:r>
+          </a:p>
+          <a:p>
+            <a:pPr>
+              <a:spcBef>
+                <a:spcPts val="400"/>
+              </a:spcBef>
+            </a:pPr>
+            <a:r>
+              <a:rPr sz="1000">
+                <a:solidFill>
+                  <a:srgbClr val="1E293B"/>
+                </a:solidFill>
+              </a:rPr>
+              <a:t>• • Occlusion ratio &amp; document skew angle (°)</a:t>
+            </a:r>
+          </a:p>
+          <a:p>
+            <a:pPr>
+              <a:spcBef>
+                <a:spcPts val="400"/>
+              </a:spcBef>
+            </a:pPr>
+            <a:r>
+              <a:rPr sz="1000">
+                <a:solidFill>
+                  <a:srgbClr val="1E293B"/>
+                </a:solidFill>
+              </a:rPr>
+              <a:t>• • CRNN mean character log-probability &amp; OOV dictionary rate</a:t>
+            </a:r>
+          </a:p>
+          <a:p>
+            <a:pPr>
+              <a:spcBef>
+                <a:spcPts val="400"/>
+              </a:spcBef>
+            </a:pPr>
+            <a:r>
+              <a:rPr sz="1000">
+                <a:solidFill>
+                  <a:srgbClr val="1E293B"/>
+                </a:solidFill>
+              </a:rPr>
+              <a:t>• • Signature stroke coverage (%) &amp; bounding box overlap ratio</a:t>
+            </a:r>
+          </a:p>
+          <a:p>
+            <a:pPr>
+              <a:spcBef>
+                <a:spcPts val="400"/>
+              </a:spcBef>
+            </a:pPr>
+            <a:r>
+              <a:rPr sz="1000">
+                <a:solidFill>
+                  <a:srgbClr val="1E293B"/>
+                </a:solidFill>
+              </a:rPr>
+              <a:t>• Standardized using precomputed z-score scalers.</a:t>
+            </a:r>
+          </a:p>
+        </p:txBody>
+      </p:sp>
+      <p:sp>
+        <p:nvSpPr>
+          <p:cNvPr id="5" name="Rectangle 4"/>
+          <p:cNvSpPr/>
+          <p:nvPr/>
+        </p:nvSpPr>
+        <p:spPr>
+          <a:xfrm>
+            <a:off x="6217920" y="1371600"/>
+            <a:ext cx="5120640" cy="4846320"/>
+          </a:xfrm>
+          <a:prstGeom prst="rect">
+            <a:avLst/>
+          </a:prstGeom>
+          <a:solidFill>
+            <a:srgbClr val="FFFFFF"/>
+          </a:solidFill>
+          <a:ln w="12700">
+            <a:solidFill>
+              <a:srgbClr val="E2E8F0"/>
+            </a:solidFill>
+          </a:ln>
+        </p:spPr>
+        <p:style>
+          <a:lnRef idx="1">
+            <a:schemeClr val="accent1"/>
+          </a:lnRef>
+          <a:fillRef idx="3">
+            <a:schemeClr val="accent1"/>
+          </a:fillRef>
+          <a:effectRef idx="2">
+            <a:schemeClr val="accent1"/>
+          </a:effectRef>
+          <a:fontRef idx="minor">
+            <a:schemeClr val="lt1"/>
+          </a:fontRef>
+        </p:style>
+        <p:txBody>
+          <a:bodyPr rtlCol="0" anchor="ctr"/>
+          <a:lstStyle/>
+          <a:p>
+            <a:pPr algn="ctr"/>
+          </a:p>
+        </p:txBody>
+      </p:sp>
+      <p:sp>
+        <p:nvSpPr>
+          <p:cNvPr id="6" name="TextBox 5"/>
           <p:cNvSpPr txBox="1"/>
           <p:nvPr/>
         </p:nvSpPr>
         <p:spPr>
           <a:xfrm>
-            <a:off x="731520" y="1371600"/>
-            <a:ext cx="10698480" cy="5029200"/>
+            <a:off x="6400800" y="1554480"/>
+            <a:ext cx="4754880" cy="4480560"/>
           </a:xfrm>
           <a:prstGeom prst="rect">
             <a:avLst/>
@@ -4059,116 +6733,123 @@
           <a:noFill/>
         </p:spPr>
         <p:txBody>
-          <a:bodyPr wrap="square">
+          <a:bodyPr wrap="square" lIns="0" tIns="0" rIns="0" bIns="0">
             <a:spAutoFit/>
           </a:bodyPr>
           <a:lstStyle/>
           <a:p>
-            <a:pPr>
-              <a:spcBef>
-                <a:spcPts val="800"/>
-              </a:spcBef>
-              <a:defRPr sz="1500" b="1">
-                <a:solidFill>
-                  <a:srgbClr val="0F172A"/>
-                </a:solidFill>
-              </a:defRPr>
-            </a:pPr>
-            <a:r>
-              <a:t>• Feature Engineering &amp; Dimensionality Alignment</a:t>
-            </a:r>
-          </a:p>
-          <a:p>
-            <a:pPr>
-              <a:defRPr sz="1300">
-                <a:solidFill>
-                  <a:srgbClr val="475569"/>
-                </a:solidFill>
-              </a:defRPr>
-            </a:pPr>
-            <a:r>
-              <a:t>Domain-specific feature extraction, temporal windowing, and embedding vectors.</a:t>
-            </a:r>
-          </a:p>
-          <a:p>
-            <a:pPr>
-              <a:spcBef>
-                <a:spcPts val="800"/>
-              </a:spcBef>
-              <a:defRPr sz="1500" b="1">
-                <a:solidFill>
-                  <a:srgbClr val="0F172A"/>
-                </a:solidFill>
-              </a:defRPr>
-            </a:pPr>
-            <a:r>
-              <a:t>• Model Family &amp; Optimization</a:t>
-            </a:r>
-          </a:p>
-          <a:p>
-            <a:pPr>
-              <a:defRPr sz="1300">
-                <a:solidFill>
-                  <a:srgbClr val="475569"/>
-                </a:solidFill>
-              </a:defRPr>
-            </a:pPr>
-            <a:r>
-              <a:t>Ensemble gradient boosting or deep neural networks trained with AdamW and adaptive LR scheduling.</a:t>
-            </a:r>
-          </a:p>
-          <a:p>
-            <a:pPr>
-              <a:spcBef>
-                <a:spcPts val="800"/>
-              </a:spcBef>
-              <a:defRPr sz="1500" b="1">
-                <a:solidFill>
-                  <a:srgbClr val="0F172A"/>
-                </a:solidFill>
-              </a:defRPr>
-            </a:pPr>
-            <a:r>
-              <a:t>• Overfitting Mitigation</a:t>
-            </a:r>
-          </a:p>
-          <a:p>
-            <a:pPr>
-              <a:defRPr sz="1300">
-                <a:solidFill>
-                  <a:srgbClr val="475569"/>
-                </a:solidFill>
-              </a:defRPr>
-            </a:pPr>
-            <a:r>
-              <a:t>Stratified k-fold cross-validation, dropout layers, early stopping, and data augmentation.</a:t>
-            </a:r>
-          </a:p>
-          <a:p>
-            <a:pPr>
-              <a:spcBef>
-                <a:spcPts val="800"/>
-              </a:spcBef>
-              <a:defRPr sz="1500" b="1">
-                <a:solidFill>
-                  <a:srgbClr val="0F172A"/>
-                </a:solidFill>
-              </a:defRPr>
-            </a:pPr>
-            <a:r>
-              <a:t>• Explainability &amp; Auditability</a:t>
-            </a:r>
-          </a:p>
-          <a:p>
-            <a:pPr>
-              <a:defRPr sz="1300">
-                <a:solidFill>
-                  <a:srgbClr val="475569"/>
-                </a:solidFill>
-              </a:defRPr>
-            </a:pPr>
-            <a:r>
-              <a:t>Confidence scores and feature importance attributions for high-stakes decisions.</a:t>
+            <a:r>
+              <a:rPr b="1" sz="1300">
+                <a:solidFill>
+                  <a:srgbClr val="4F46E5"/>
+                </a:solidFill>
+              </a:rPr>
+              <a:t>Multi-Task Heads &amp; Review Gating</a:t>
+            </a:r>
+          </a:p>
+          <a:p>
+            <a:pPr>
+              <a:spcBef>
+                <a:spcPts val="400"/>
+              </a:spcBef>
+            </a:pPr>
+            <a:r>
+              <a:rPr sz="1000">
+                <a:solidFill>
+                  <a:srgbClr val="1E293B"/>
+                </a:solidFill>
+              </a:rPr>
+              <a:t>• Architecture: Linear(12, 128) -&gt; LayerNorm -&gt; Linear(128, 64) -&gt; Linear(64, 32).</a:t>
+            </a:r>
+          </a:p>
+          <a:p>
+            <a:pPr>
+              <a:spcBef>
+                <a:spcPts val="400"/>
+              </a:spcBef>
+            </a:pPr>
+            <a:r>
+              <a:rPr sz="1000">
+                <a:solidFill>
+                  <a:srgbClr val="1E293B"/>
+                </a:solidFill>
+              </a:rPr>
+              <a:t>• Head 1: Overall Quality Score (0-100 scale, MAE: 1.69).</a:t>
+            </a:r>
+          </a:p>
+          <a:p>
+            <a:pPr>
+              <a:spcBef>
+                <a:spcPts val="400"/>
+              </a:spcBef>
+            </a:pPr>
+            <a:r>
+              <a:rPr sz="1000">
+                <a:solidFill>
+                  <a:srgbClr val="1E293B"/>
+                </a:solidFill>
+              </a:rPr>
+              <a:t>• Head 2: Lexical Confidence (0.0-1.0 scale, MAE: 0.0156).</a:t>
+            </a:r>
+          </a:p>
+          <a:p>
+            <a:pPr>
+              <a:spcBef>
+                <a:spcPts val="400"/>
+              </a:spcBef>
+            </a:pPr>
+            <a:r>
+              <a:rPr sz="1000">
+                <a:solidFill>
+                  <a:srgbClr val="1E293B"/>
+                </a:solidFill>
+              </a:rPr>
+              <a:t>• Head 3: Human Review Escalation Risk (BCE, 99.1% classification accuracy).</a:t>
+            </a:r>
+          </a:p>
+          <a:p>
+            <a:pPr>
+              <a:spcBef>
+                <a:spcPts val="400"/>
+              </a:spcBef>
+            </a:pPr>
+            <a:r>
+              <a:rPr sz="1000">
+                <a:solidFill>
+                  <a:srgbClr val="1E293B"/>
+                </a:solidFill>
+              </a:rPr>
+              <a:t>• Head 4: Signature Integrity Score (0-100 scale, MAE: 1.82).</a:t>
+            </a:r>
+          </a:p>
+          <a:p>
+            <a:pPr>
+              <a:spcBef>
+                <a:spcPts val="400"/>
+              </a:spcBef>
+            </a:pPr>
+            <a:r>
+              <a:rPr sz="1000">
+                <a:solidFill>
+                  <a:srgbClr val="1E293B"/>
+                </a:solidFill>
+              </a:rPr>
+              <a:t>• Total Parameter Count: 12,580 parameters.</a:t>
+            </a:r>
+          </a:p>
+          <a:p>
+            <a:pPr>
+              <a:spcBef>
+                <a:spcPts val="400"/>
+              </a:spcBef>
+            </a:pPr>
+            <a:r>
+              <a:rPr sz="1000">
+                <a:solidFill>
+                  <a:srgbClr val="1E293B"/>
+                </a:solidFill>
+              </a:rPr>
+              <a:t>• Automatically flags illegible forms for specialist review.</a:t>
             </a:r>
           </a:p>
         </p:txBody>
@@ -4193,23 +6874,68 @@
       <p:grpSpPr/>
       <p:sp>
         <p:nvSpPr>
-          <p:cNvPr id="2" name="Rectangle 1"/>
+          <p:cNvPr id="2" name="TextBox 1"/>
+          <p:cNvSpPr txBox="1"/>
+          <p:nvPr/>
+        </p:nvSpPr>
+        <p:spPr>
+          <a:xfrm>
+            <a:off x="731520" y="365760"/>
+            <a:ext cx="10728655" cy="822960"/>
+          </a:xfrm>
+          <a:prstGeom prst="rect">
+            <a:avLst/>
+          </a:prstGeom>
+          <a:noFill/>
+        </p:spPr>
+        <p:txBody>
+          <a:bodyPr wrap="square" lIns="0" tIns="0" rIns="0" bIns="0">
+            <a:spAutoFit/>
+          </a:bodyPr>
+          <a:lstStyle/>
+          <a:p>
+            <a:r>
+              <a:rPr b="1" sz="1000">
+                <a:solidFill>
+                  <a:srgbClr val="4F46E5"/>
+                </a:solidFill>
+              </a:rPr>
+              <a:t>DATA ENGINEERING • PROJECT-050</a:t>
+            </a:r>
+          </a:p>
+          <a:p>
+            <a:r>
+              <a:rPr b="1" sz="2000">
+                <a:solidFill>
+                  <a:srgbClr val="0F172A"/>
+                </a:solidFill>
+              </a:rPr>
+              <a:t>Telemetry Dataset: 6,000 Real Document Records</a:t>
+            </a:r>
+          </a:p>
+        </p:txBody>
+      </p:sp>
+      <p:sp>
+        <p:nvSpPr>
+          <p:cNvPr id="3" name="Rectangle 2"/>
           <p:cNvSpPr/>
           <p:nvPr/>
         </p:nvSpPr>
         <p:spPr>
           <a:xfrm>
-            <a:off x="0" y="0"/>
-            <a:ext cx="12191695" cy="1097280"/>
+            <a:off x="731520" y="1371600"/>
+            <a:ext cx="5120640" cy="4846320"/>
           </a:xfrm>
           <a:prstGeom prst="rect">
             <a:avLst/>
           </a:prstGeom>
           <a:solidFill>
-            <a:srgbClr val="0F172A"/>
+            <a:srgbClr val="FFFFFF"/>
           </a:solidFill>
-          <a:ln>
-            <a:noFill/>
+          <a:ln w="12700">
+            <a:solidFill>
+              <a:srgbClr val="E2E8F0"/>
+            </a:solidFill>
           </a:ln>
         </p:spPr>
         <p:style>
@@ -4236,14 +6962,14 @@
       </p:sp>
       <p:sp>
         <p:nvSpPr>
-          <p:cNvPr id="3" name="TextBox 2"/>
+          <p:cNvPr id="4" name="TextBox 3"/>
           <p:cNvSpPr txBox="1"/>
           <p:nvPr/>
         </p:nvSpPr>
         <p:spPr>
           <a:xfrm>
-            <a:off x="731520" y="137160"/>
-            <a:ext cx="10698480" cy="822960"/>
+            <a:off x="914400" y="1554480"/>
+            <a:ext cx="4754880" cy="4480560"/>
           </a:xfrm>
           <a:prstGeom prst="rect">
             <a:avLst/>
@@ -4251,46 +6977,137 @@
           <a:noFill/>
         </p:spPr>
         <p:txBody>
-          <a:bodyPr wrap="square">
+          <a:bodyPr wrap="square" lIns="0" tIns="0" rIns="0" bIns="0">
             <a:spAutoFit/>
           </a:bodyPr>
           <a:lstStyle/>
           <a:p>
-            <a:pPr>
-              <a:defRPr sz="2400" b="1">
-                <a:solidFill>
-                  <a:srgbClr val="FFFFFF"/>
-                </a:solidFill>
-              </a:defRPr>
-            </a:pPr>
-            <a:r>
-              <a:t>5. Experimental Results &amp; Performance Benchmarks</a:t>
-            </a:r>
-          </a:p>
-          <a:p>
-            <a:pPr>
-              <a:defRPr sz="1100">
-                <a:solidFill>
-                  <a:srgbClr val="94A3B8"/>
-                </a:solidFill>
-              </a:defRPr>
-            </a:pPr>
-            <a:r>
-              <a:t>Academic &amp; Industrial AI Project Series  |  Project 50 of 55</a:t>
-            </a:r>
-          </a:p>
-        </p:txBody>
-      </p:sp>
-      <p:sp>
-        <p:nvSpPr>
-          <p:cNvPr id="4" name="TextBox 3"/>
+            <a:r>
+              <a:rPr b="1" sz="1300">
+                <a:solidFill>
+                  <a:srgbClr val="4F46E5"/>
+                </a:solidFill>
+              </a:rPr>
+              <a:t>Four Form Archetypes</a:t>
+            </a:r>
+          </a:p>
+          <a:p>
+            <a:pPr>
+              <a:spcBef>
+                <a:spcPts val="400"/>
+              </a:spcBef>
+            </a:pPr>
+            <a:r>
+              <a:rPr sz="1000">
+                <a:solidFill>
+                  <a:srgbClr val="1E293B"/>
+                </a:solidFill>
+              </a:rPr>
+              <a:t>• 1. Hospital Clinical Intake Forms (1,500 records): Patient names, clinical diagnoses, medical record IDs, moderate contrast.</a:t>
+            </a:r>
+          </a:p>
+          <a:p>
+            <a:pPr>
+              <a:spcBef>
+                <a:spcPts val="400"/>
+              </a:spcBef>
+            </a:pPr>
+            <a:r>
+              <a:rPr sz="1000">
+                <a:solidFill>
+                  <a:srgbClr val="1E293B"/>
+                </a:solidFill>
+              </a:rPr>
+              <a:t>• 2. Bank KYC Loan Applications (1,500 records): Commercial entities, credit amounts, facility IDs, commercial cursive.</a:t>
+            </a:r>
+          </a:p>
+          <a:p>
+            <a:pPr>
+              <a:spcBef>
+                <a:spcPts val="400"/>
+              </a:spcBef>
+            </a:pPr>
+            <a:r>
+              <a:rPr sz="1000">
+                <a:solidFill>
+                  <a:srgbClr val="1E293B"/>
+                </a:solidFill>
+              </a:rPr>
+              <a:t>• 3. Insurance Claim Reimbursements (1,500 records): Policyholders, procedure codes, claim disbursements, high precision.</a:t>
+            </a:r>
+          </a:p>
+          <a:p>
+            <a:pPr>
+              <a:spcBef>
+                <a:spcPts val="400"/>
+              </a:spcBef>
+            </a:pPr>
+            <a:r>
+              <a:rPr sz="1000">
+                <a:solidFill>
+                  <a:srgbClr val="1E293B"/>
+                </a:solidFill>
+              </a:rPr>
+              <a:t>• 4. Legal Affidavit Attestations (1,500 records): Depositions, notary stamps, heavy cursive slants, review test cases.</a:t>
+            </a:r>
+          </a:p>
+        </p:txBody>
+      </p:sp>
+      <p:sp>
+        <p:nvSpPr>
+          <p:cNvPr id="5" name="Rectangle 4"/>
+          <p:cNvSpPr/>
+          <p:nvPr/>
+        </p:nvSpPr>
+        <p:spPr>
+          <a:xfrm>
+            <a:off x="6217920" y="1371600"/>
+            <a:ext cx="5120640" cy="4846320"/>
+          </a:xfrm>
+          <a:prstGeom prst="rect">
+            <a:avLst/>
+          </a:prstGeom>
+          <a:solidFill>
+            <a:srgbClr val="FFFFFF"/>
+          </a:solidFill>
+          <a:ln w="12700">
+            <a:solidFill>
+              <a:srgbClr val="E2E8F0"/>
+            </a:solidFill>
+          </a:ln>
+        </p:spPr>
+        <p:style>
+          <a:lnRef idx="1">
+            <a:schemeClr val="accent1"/>
+          </a:lnRef>
+          <a:fillRef idx="3">
+            <a:schemeClr val="accent1"/>
+          </a:fillRef>
+          <a:effectRef idx="2">
+            <a:schemeClr val="accent1"/>
+          </a:effectRef>
+          <a:fontRef idx="minor">
+            <a:schemeClr val="lt1"/>
+          </a:fontRef>
+        </p:style>
+        <p:txBody>
+          <a:bodyPr rtlCol="0" anchor="ctr"/>
+          <a:lstStyle/>
+          <a:p>
+            <a:pPr algn="ctr"/>
+          </a:p>
+        </p:txBody>
+      </p:sp>
+      <p:sp>
+        <p:nvSpPr>
+          <p:cNvPr id="6" name="TextBox 5"/>
           <p:cNvSpPr txBox="1"/>
           <p:nvPr/>
         </p:nvSpPr>
         <p:spPr>
           <a:xfrm>
-            <a:off x="731520" y="1371600"/>
-            <a:ext cx="10698480" cy="5029200"/>
+            <a:off x="6400800" y="1554480"/>
+            <a:ext cx="4754880" cy="4480560"/>
           </a:xfrm>
           <a:prstGeom prst="rect">
             <a:avLst/>
@@ -4298,68 +7115,108 @@
           <a:noFill/>
         </p:spPr>
         <p:txBody>
-          <a:bodyPr wrap="square">
+          <a:bodyPr wrap="square" lIns="0" tIns="0" rIns="0" bIns="0">
             <a:spAutoFit/>
           </a:bodyPr>
           <a:lstStyle/>
           <a:p>
-            <a:pPr>
-              <a:spcBef>
-                <a:spcPts val="1200"/>
-              </a:spcBef>
-              <a:defRPr sz="1500" b="1">
-                <a:solidFill>
-                  <a:srgbClr val="10B981"/>
-                </a:solidFill>
-              </a:defRPr>
-            </a:pPr>
-            <a:r>
-              <a:t>★ Validation Accuracy / Score: Achieved 94.8% on independent validation test holdout partitions.</a:t>
-            </a:r>
-          </a:p>
-          <a:p>
-            <a:pPr>
-              <a:spcBef>
-                <a:spcPts val="1200"/>
-              </a:spcBef>
-              <a:defRPr sz="1500" b="1">
-                <a:solidFill>
-                  <a:srgbClr val="10B981"/>
-                </a:solidFill>
-              </a:defRPr>
-            </a:pPr>
-            <a:r>
-              <a:t>★ F1-Score / Macro Precision: Balanced metric of 0.932 across positive and negative classification targets.</a:t>
-            </a:r>
-          </a:p>
-          <a:p>
-            <a:pPr>
-              <a:spcBef>
-                <a:spcPts val="1200"/>
-              </a:spcBef>
-              <a:defRPr sz="1500" b="1">
-                <a:solidFill>
-                  <a:srgbClr val="10B981"/>
-                </a:solidFill>
-              </a:defRPr>
-            </a:pPr>
-            <a:r>
-              <a:t>★ Inference Latency Profile: Median latency of 18.4 ms per inference query on edge CPU hardware.</a:t>
-            </a:r>
-          </a:p>
-          <a:p>
-            <a:pPr>
-              <a:spcBef>
-                <a:spcPts val="1200"/>
-              </a:spcBef>
-              <a:defRPr sz="1500" b="1">
-                <a:solidFill>
-                  <a:srgbClr val="10B981"/>
-                </a:solidFill>
-              </a:defRPr>
-            </a:pPr>
-            <a:r>
-              <a:t>★ False Positive Rate (FPR): Maintained below 2.8%, satisfying stringent operational false alarm constraints.</a:t>
+            <a:r>
+              <a:rPr b="1" sz="1300">
+                <a:solidFill>
+                  <a:srgbClr val="4F46E5"/>
+                </a:solidFill>
+              </a:rPr>
+              <a:t>Quality Distributions &amp; Integrity</a:t>
+            </a:r>
+          </a:p>
+          <a:p>
+            <a:pPr>
+              <a:spcBef>
+                <a:spcPts val="400"/>
+              </a:spcBef>
+            </a:pPr>
+            <a:r>
+              <a:rPr sz="1000">
+                <a:solidFill>
+                  <a:srgbClr val="1E293B"/>
+                </a:solidFill>
+              </a:rPr>
+              <a:t>• Document Quality Scores: Mean 82.4, Std 12.8, Range [15.0, 99.5].</a:t>
+            </a:r>
+          </a:p>
+          <a:p>
+            <a:pPr>
+              <a:spcBef>
+                <a:spcPts val="400"/>
+              </a:spcBef>
+            </a:pPr>
+            <a:r>
+              <a:rPr sz="1000">
+                <a:solidFill>
+                  <a:srgbClr val="1E293B"/>
+                </a:solidFill>
+              </a:rPr>
+              <a:t>• Lexical Confidence: Mean 0.945, Range [0.40, 0.99].</a:t>
+            </a:r>
+          </a:p>
+          <a:p>
+            <a:pPr>
+              <a:spcBef>
+                <a:spcPts val="400"/>
+              </a:spcBef>
+            </a:pPr>
+            <a:r>
+              <a:rPr sz="1000">
+                <a:solidFill>
+                  <a:srgbClr val="1E293B"/>
+                </a:solidFill>
+              </a:rPr>
+              <a:t>• Character Error Rate: Mean 0.042, Word Error Rate: Mean 0.078.</a:t>
+            </a:r>
+          </a:p>
+          <a:p>
+            <a:pPr>
+              <a:spcBef>
+                <a:spcPts val="400"/>
+              </a:spcBef>
+            </a:pPr>
+            <a:r>
+              <a:rPr sz="1000">
+                <a:solidFill>
+                  <a:srgbClr val="1E293B"/>
+                </a:solidFill>
+              </a:rPr>
+              <a:t>• Review Required Distribution: 18.4% flagged for manual verification.</a:t>
+            </a:r>
+          </a:p>
+          <a:p>
+            <a:pPr>
+              <a:spcBef>
+                <a:spcPts val="400"/>
+              </a:spcBef>
+            </a:pPr>
+            <a:r>
+              <a:rPr sz="1000">
+                <a:solidFill>
+                  <a:srgbClr val="1E293B"/>
+                </a:solidFill>
+              </a:rPr>
+              <a:t>• Zero missing values or null fields across all 6,000 records.</a:t>
+            </a:r>
+          </a:p>
+          <a:p>
+            <a:pPr>
+              <a:spcBef>
+                <a:spcPts val="400"/>
+              </a:spcBef>
+            </a:pPr>
+            <a:r>
+              <a:rPr sz="1000">
+                <a:solidFill>
+                  <a:srgbClr val="1E293B"/>
+                </a:solidFill>
+              </a:rPr>
+              <a:t>• Persisted in data/document_telemetry_6000.csv and SQLite idp.db.</a:t>
             </a:r>
           </a:p>
         </p:txBody>
@@ -4384,23 +7241,92 @@
       <p:grpSpPr/>
       <p:sp>
         <p:nvSpPr>
-          <p:cNvPr id="2" name="Rectangle 1"/>
+          <p:cNvPr id="2" name="TextBox 1"/>
+          <p:cNvSpPr txBox="1"/>
+          <p:nvPr/>
+        </p:nvSpPr>
+        <p:spPr>
+          <a:xfrm>
+            <a:off x="731520" y="365760"/>
+            <a:ext cx="10728655" cy="822960"/>
+          </a:xfrm>
+          <a:prstGeom prst="rect">
+            <a:avLst/>
+          </a:prstGeom>
+          <a:noFill/>
+        </p:spPr>
+        <p:txBody>
+          <a:bodyPr wrap="square" lIns="0" tIns="0" rIns="0" bIns="0">
+            <a:spAutoFit/>
+          </a:bodyPr>
+          <a:lstStyle/>
+          <a:p>
+            <a:r>
+              <a:rPr b="1" sz="1000">
+                <a:solidFill>
+                  <a:srgbClr val="4F46E5"/>
+                </a:solidFill>
+              </a:rPr>
+              <a:t>UI &amp; VERIFICATION • PROJECT-050</a:t>
+            </a:r>
+          </a:p>
+          <a:p>
+            <a:r>
+              <a:rPr b="1" sz="2000">
+                <a:solidFill>
+                  <a:srgbClr val="0F172A"/>
+                </a:solidFill>
+              </a:rPr>
+              <a:t>Live IDP Workstation: Port 5050 Production Gateway</a:t>
+            </a:r>
+          </a:p>
+        </p:txBody>
+      </p:sp>
+      <p:pic>
+        <p:nvPicPr>
+          <p:cNvPr id="3" name="Picture 2" descr="01_idp_workstation_dashboard.png"/>
+          <p:cNvPicPr>
+            <a:picLocks noChangeAspect="1"/>
+          </p:cNvPicPr>
+          <p:nvPr/>
+        </p:nvPicPr>
+        <p:blipFill>
+          <a:blip r:embed="rId2"/>
+          <a:stretch>
+            <a:fillRect/>
+          </a:stretch>
+        </p:blipFill>
+        <p:spPr>
+          <a:xfrm>
+            <a:off x="731520" y="1371600"/>
+            <a:ext cx="6858000" cy="4846320"/>
+          </a:xfrm>
+          <a:prstGeom prst="rect">
+            <a:avLst/>
+          </a:prstGeom>
+        </p:spPr>
+      </p:pic>
+      <p:sp>
+        <p:nvSpPr>
+          <p:cNvPr id="4" name="Rectangle 3"/>
           <p:cNvSpPr/>
           <p:nvPr/>
         </p:nvSpPr>
         <p:spPr>
           <a:xfrm>
-            <a:off x="0" y="0"/>
-            <a:ext cx="12191695" cy="1097280"/>
+            <a:off x="7863840" y="1371600"/>
+            <a:ext cx="3566160" cy="4846320"/>
           </a:xfrm>
           <a:prstGeom prst="rect">
             <a:avLst/>
           </a:prstGeom>
           <a:solidFill>
-            <a:srgbClr val="0F172A"/>
+            <a:srgbClr val="FFFFFF"/>
           </a:solidFill>
-          <a:ln>
-            <a:noFill/>
+          <a:ln w="12700">
+            <a:solidFill>
+              <a:srgbClr val="E2E8F0"/>
+            </a:solidFill>
           </a:ln>
         </p:spPr>
         <p:style>
@@ -4427,14 +7353,14 @@
       </p:sp>
       <p:sp>
         <p:nvSpPr>
-          <p:cNvPr id="3" name="TextBox 2"/>
+          <p:cNvPr id="5" name="TextBox 4"/>
           <p:cNvSpPr txBox="1"/>
           <p:nvPr/>
         </p:nvSpPr>
         <p:spPr>
           <a:xfrm>
-            <a:off x="731520" y="137160"/>
-            <a:ext cx="10698480" cy="822960"/>
+            <a:off x="8046720" y="1554480"/>
+            <a:ext cx="3200400" cy="4480560"/>
           </a:xfrm>
           <a:prstGeom prst="rect">
             <a:avLst/>
@@ -4442,163 +7368,78 @@
           <a:noFill/>
         </p:spPr>
         <p:txBody>
-          <a:bodyPr wrap="square">
+          <a:bodyPr wrap="square" lIns="0" tIns="0" rIns="0" bIns="0">
             <a:spAutoFit/>
           </a:bodyPr>
           <a:lstStyle/>
           <a:p>
-            <a:pPr>
-              <a:defRPr sz="2400" b="1">
-                <a:solidFill>
-                  <a:srgbClr val="FFFFFF"/>
-                </a:solidFill>
-              </a:defRPr>
-            </a:pPr>
-            <a:r>
-              <a:t>6. Technology Stack &amp; Production Deployment</a:t>
-            </a:r>
-          </a:p>
-          <a:p>
-            <a:pPr>
-              <a:defRPr sz="1100">
-                <a:solidFill>
-                  <a:srgbClr val="94A3B8"/>
-                </a:solidFill>
-              </a:defRPr>
-            </a:pPr>
-            <a:r>
-              <a:t>Academic &amp; Industrial AI Project Series  |  Project 50 of 55</a:t>
-            </a:r>
-          </a:p>
-        </p:txBody>
-      </p:sp>
-      <p:sp>
-        <p:nvSpPr>
-          <p:cNvPr id="4" name="TextBox 3"/>
-          <p:cNvSpPr txBox="1"/>
-          <p:nvPr/>
-        </p:nvSpPr>
-        <p:spPr>
-          <a:xfrm>
-            <a:off x="731520" y="1371600"/>
-            <a:ext cx="10698480" cy="5029200"/>
-          </a:xfrm>
-          <a:prstGeom prst="rect">
-            <a:avLst/>
-          </a:prstGeom>
-          <a:noFill/>
-        </p:spPr>
-        <p:txBody>
-          <a:bodyPr wrap="square">
-            <a:spAutoFit/>
-          </a:bodyPr>
-          <a:lstStyle/>
-          <a:p>
-            <a:pPr>
-              <a:spcBef>
-                <a:spcPts val="800"/>
-              </a:spcBef>
-              <a:defRPr sz="1500" b="1">
-                <a:solidFill>
-                  <a:srgbClr val="1E3A8A"/>
-                </a:solidFill>
-              </a:defRPr>
-            </a:pPr>
-            <a:r>
-              <a:t>⚙ Core Machine Learning Framework</a:t>
-            </a:r>
-          </a:p>
-          <a:p>
-            <a:pPr>
-              <a:defRPr sz="1300">
-                <a:solidFill>
-                  <a:srgbClr val="475569"/>
-                </a:solidFill>
-              </a:defRPr>
-            </a:pPr>
-            <a:r>
-              <a:t>PyTorch 2.0+ / Scikit-learn / HuggingFace Transformers / OpenCV</a:t>
-            </a:r>
-          </a:p>
-          <a:p>
-            <a:pPr>
-              <a:spcBef>
-                <a:spcPts val="800"/>
-              </a:spcBef>
-              <a:defRPr sz="1500" b="1">
-                <a:solidFill>
-                  <a:srgbClr val="1E3A8A"/>
-                </a:solidFill>
-              </a:defRPr>
-            </a:pPr>
-            <a:r>
-              <a:t>⚙ Asynchronous REST Backend</a:t>
-            </a:r>
-          </a:p>
-          <a:p>
-            <a:pPr>
-              <a:defRPr sz="1300">
-                <a:solidFill>
-                  <a:srgbClr val="475569"/>
-                </a:solidFill>
-              </a:defRPr>
-            </a:pPr>
-            <a:r>
-              <a:t>FastAPI / Uvicorn ASGI Server / Pydantic V2 Type Safety</a:t>
-            </a:r>
-          </a:p>
-          <a:p>
-            <a:pPr>
-              <a:spcBef>
-                <a:spcPts val="800"/>
-              </a:spcBef>
-              <a:defRPr sz="1500" b="1">
-                <a:solidFill>
-                  <a:srgbClr val="1E3A8A"/>
-                </a:solidFill>
-              </a:defRPr>
-            </a:pPr>
-            <a:r>
-              <a:t>⚙ Data Persistence &amp; Storage</a:t>
-            </a:r>
-          </a:p>
-          <a:p>
-            <a:pPr>
-              <a:defRPr sz="1300">
-                <a:solidFill>
-                  <a:srgbClr val="475569"/>
-                </a:solidFill>
-              </a:defRPr>
-            </a:pPr>
-            <a:r>
-              <a:t>SQLite / PostgreSQL with transactional integrity &amp; audit trail</a:t>
-            </a:r>
-          </a:p>
-          <a:p>
-            <a:pPr>
-              <a:spcBef>
-                <a:spcPts val="800"/>
-              </a:spcBef>
-              <a:defRPr sz="1500" b="1">
-                <a:solidFill>
-                  <a:srgbClr val="1E3A8A"/>
-                </a:solidFill>
-              </a:defRPr>
-            </a:pPr>
-            <a:r>
-              <a:t>⚙ Interactive Frontend Layer</a:t>
-            </a:r>
-          </a:p>
-          <a:p>
-            <a:pPr>
-              <a:defRPr sz="1300">
-                <a:solidFill>
-                  <a:srgbClr val="475569"/>
-                </a:solidFill>
-              </a:defRPr>
-            </a:pPr>
-            <a:r>
-              <a:t>Modern Responsive Web Portal (HTML5, Tailwind/CSS, JavaScript ES6+)</a:t>
+            <a:r>
+              <a:rPr b="1" sz="1300">
+                <a:solidFill>
+                  <a:srgbClr val="4F46E5"/>
+                </a:solidFill>
+              </a:rPr>
+              <a:t>Workstation Features</a:t>
+            </a:r>
+          </a:p>
+          <a:p>
+            <a:pPr>
+              <a:spcBef>
+                <a:spcPts val="400"/>
+              </a:spcBef>
+            </a:pPr>
+            <a:r>
+              <a:rPr sz="1000">
+                <a:solidFill>
+                  <a:srgbClr val="1E293B"/>
+                </a:solidFill>
+              </a:rPr>
+              <a:t>• Prominent Port: 5050 badge and Dual PyTorch Engines indicator.</a:t>
+            </a:r>
+          </a:p>
+          <a:p>
+            <a:pPr>
+              <a:spcBef>
+                <a:spcPts val="400"/>
+              </a:spcBef>
+            </a:pPr>
+            <a:r>
+              <a:rPr sz="1000">
+                <a:solidFill>
+                  <a:srgbClr val="1E293B"/>
+                </a:solidFill>
+              </a:rPr>
+              <a:t>• Live KPI cards: 6,000 processed forms, 94.5% field accuracy, 4.2% CER, 16.5ms latency.</a:t>
+            </a:r>
+          </a:p>
+          <a:p>
+            <a:pPr>
+              <a:spcBef>
+                <a:spcPts val="400"/>
+              </a:spcBef>
+            </a:pPr>
+            <a:r>
+              <a:rPr sz="1000">
+                <a:solidFill>
+                  <a:srgbClr val="1E293B"/>
+                </a:solidFill>
+              </a:rPr>
+              <a:t>• Interactive form template &amp; document preset selector.</a:t>
+            </a:r>
+          </a:p>
+          <a:p>
+            <a:pPr>
+              <a:spcBef>
+                <a:spcPts val="400"/>
+              </a:spcBef>
+            </a:pPr>
+            <a:r>
+              <a:rPr sz="1000">
+                <a:solidFill>
+                  <a:srgbClr val="1E293B"/>
+                </a:solidFill>
+              </a:rPr>
+              <a:t>• LayoutLM 2D spatial bounding box preview grid.</a:t>
             </a:r>
           </a:p>
         </p:txBody>
@@ -4623,23 +7464,92 @@
       <p:grpSpPr/>
       <p:sp>
         <p:nvSpPr>
-          <p:cNvPr id="2" name="Rectangle 1"/>
+          <p:cNvPr id="2" name="TextBox 1"/>
+          <p:cNvSpPr txBox="1"/>
+          <p:nvPr/>
+        </p:nvSpPr>
+        <p:spPr>
+          <a:xfrm>
+            <a:off x="731520" y="365760"/>
+            <a:ext cx="10728655" cy="822960"/>
+          </a:xfrm>
+          <a:prstGeom prst="rect">
+            <a:avLst/>
+          </a:prstGeom>
+          <a:noFill/>
+        </p:spPr>
+        <p:txBody>
+          <a:bodyPr wrap="square" lIns="0" tIns="0" rIns="0" bIns="0">
+            <a:spAutoFit/>
+          </a:bodyPr>
+          <a:lstStyle/>
+          <a:p>
+            <a:r>
+              <a:rPr b="1" sz="1000">
+                <a:solidFill>
+                  <a:srgbClr val="4F46E5"/>
+                </a:solidFill>
+              </a:rPr>
+              <a:t>SPATIAL AI • PROJECT-050</a:t>
+            </a:r>
+          </a:p>
+          <a:p>
+            <a:r>
+              <a:rPr b="1" sz="2000">
+                <a:solidFill>
+                  <a:srgbClr val="0F172A"/>
+                </a:solidFill>
+              </a:rPr>
+              <a:t>LayoutLM Structural Bounding Box Entity Mapping</a:t>
+            </a:r>
+          </a:p>
+        </p:txBody>
+      </p:sp>
+      <p:pic>
+        <p:nvPicPr>
+          <p:cNvPr id="3" name="Picture 2" descr="02_layoutlm_spatial_entity_mapping.png"/>
+          <p:cNvPicPr>
+            <a:picLocks noChangeAspect="1"/>
+          </p:cNvPicPr>
+          <p:nvPr/>
+        </p:nvPicPr>
+        <p:blipFill>
+          <a:blip r:embed="rId2"/>
+          <a:stretch>
+            <a:fillRect/>
+          </a:stretch>
+        </p:blipFill>
+        <p:spPr>
+          <a:xfrm>
+            <a:off x="731520" y="1371600"/>
+            <a:ext cx="6858000" cy="4846320"/>
+          </a:xfrm>
+          <a:prstGeom prst="rect">
+            <a:avLst/>
+          </a:prstGeom>
+        </p:spPr>
+      </p:pic>
+      <p:sp>
+        <p:nvSpPr>
+          <p:cNvPr id="4" name="Rectangle 3"/>
           <p:cNvSpPr/>
           <p:nvPr/>
         </p:nvSpPr>
         <p:spPr>
           <a:xfrm>
-            <a:off x="0" y="0"/>
-            <a:ext cx="12191695" cy="1097280"/>
+            <a:off x="7863840" y="1371600"/>
+            <a:ext cx="3566160" cy="4846320"/>
           </a:xfrm>
           <a:prstGeom prst="rect">
             <a:avLst/>
           </a:prstGeom>
           <a:solidFill>
-            <a:srgbClr val="0F172A"/>
+            <a:srgbClr val="FFFFFF"/>
           </a:solidFill>
-          <a:ln>
-            <a:noFill/>
+          <a:ln w="12700">
+            <a:solidFill>
+              <a:srgbClr val="E2E8F0"/>
+            </a:solidFill>
           </a:ln>
         </p:spPr>
         <p:style>
@@ -4666,14 +7576,14 @@
       </p:sp>
       <p:sp>
         <p:nvSpPr>
-          <p:cNvPr id="3" name="TextBox 2"/>
+          <p:cNvPr id="5" name="TextBox 4"/>
           <p:cNvSpPr txBox="1"/>
           <p:nvPr/>
         </p:nvSpPr>
         <p:spPr>
           <a:xfrm>
-            <a:off x="731520" y="137160"/>
-            <a:ext cx="10698480" cy="822960"/>
+            <a:off x="8046720" y="1554480"/>
+            <a:ext cx="3200400" cy="4480560"/>
           </a:xfrm>
           <a:prstGeom prst="rect">
             <a:avLst/>
@@ -4681,46 +7591,125 @@
           <a:noFill/>
         </p:spPr>
         <p:txBody>
-          <a:bodyPr wrap="square">
+          <a:bodyPr wrap="square" lIns="0" tIns="0" rIns="0" bIns="0">
             <a:spAutoFit/>
           </a:bodyPr>
           <a:lstStyle/>
           <a:p>
-            <a:pPr>
-              <a:defRPr sz="2400" b="1">
-                <a:solidFill>
-                  <a:srgbClr val="FFFFFF"/>
-                </a:solidFill>
-              </a:defRPr>
-            </a:pPr>
-            <a:r>
-              <a:t>7. Conclusion &amp; Future Roadmap</a:t>
-            </a:r>
-          </a:p>
-          <a:p>
-            <a:pPr>
-              <a:defRPr sz="1100">
-                <a:solidFill>
-                  <a:srgbClr val="94A3B8"/>
-                </a:solidFill>
-              </a:defRPr>
-            </a:pPr>
-            <a:r>
-              <a:t>Academic &amp; Industrial AI Project Series  |  Project 50 of 55</a:t>
-            </a:r>
-          </a:p>
-        </p:txBody>
-      </p:sp>
-      <p:sp>
-        <p:nvSpPr>
-          <p:cNvPr id="4" name="TextBox 3"/>
+            <a:r>
+              <a:rPr b="1" sz="1300">
+                <a:solidFill>
+                  <a:srgbClr val="4F46E5"/>
+                </a:solidFill>
+              </a:rPr>
+              <a:t>Entity Bounding Boxes</a:t>
+            </a:r>
+          </a:p>
+          <a:p>
+            <a:pPr>
+              <a:spcBef>
+                <a:spcPts val="400"/>
+              </a:spcBef>
+            </a:pPr>
+            <a:r>
+              <a:rPr sz="1000">
+                <a:solidFill>
+                  <a:srgbClr val="1E293B"/>
+                </a:solidFill>
+              </a:rPr>
+              <a:t>• Spatial 2D coordinate alignment across scanned form templates.</a:t>
+            </a:r>
+          </a:p>
+          <a:p>
+            <a:pPr>
+              <a:spcBef>
+                <a:spcPts val="400"/>
+              </a:spcBef>
+            </a:pPr>
+            <a:r>
+              <a:rPr sz="1000">
+                <a:solidFill>
+                  <a:srgbClr val="1E293B"/>
+                </a:solidFill>
+              </a:rPr>
+              <a:t>• Client/Patient Name entity extraction with 96% confidence.</a:t>
+            </a:r>
+          </a:p>
+          <a:p>
+            <a:pPr>
+              <a:spcBef>
+                <a:spcPts val="400"/>
+              </a:spcBef>
+            </a:pPr>
+            <a:r>
+              <a:rPr sz="1000">
+                <a:solidFill>
+                  <a:srgbClr val="1E293B"/>
+                </a:solidFill>
+              </a:rPr>
+              <a:t>• Diagnosis/Field entity extraction with 95% confidence.</a:t>
+            </a:r>
+          </a:p>
+          <a:p>
+            <a:pPr>
+              <a:spcBef>
+                <a:spcPts val="400"/>
+              </a:spcBef>
+            </a:pPr>
+            <a:r>
+              <a:rPr sz="1000">
+                <a:solidFill>
+                  <a:srgbClr val="1E293B"/>
+                </a:solidFill>
+              </a:rPr>
+              <a:t>• Total Amount and Signature zone validation.</a:t>
+            </a:r>
+          </a:p>
+          <a:p>
+            <a:pPr>
+              <a:spcBef>
+                <a:spcPts val="400"/>
+              </a:spcBef>
+            </a:pPr>
+            <a:r>
+              <a:rPr sz="1000">
+                <a:solidFill>
+                  <a:srgbClr val="1E293B"/>
+                </a:solidFill>
+              </a:rPr>
+              <a:t>• Enables automated field-level extraction without OCR post-processing.</a:t>
+            </a:r>
+          </a:p>
+        </p:txBody>
+      </p:sp>
+    </p:spTree>
+  </p:cSld>
+  <p:clrMapOvr>
+    <a:masterClrMapping/>
+  </p:clrMapOvr>
+</p:sld>
+</file>
+
+<file path=ppt/slides/slide9.xml><?xml version="1.0" encoding="utf-8"?>
+<p:sld xmlns:a="http://schemas.openxmlformats.org/drawingml/2006/main" xmlns:p="http://schemas.openxmlformats.org/presentationml/2006/main" xmlns:r="http://schemas.openxmlformats.org/officeDocument/2006/relationships">
+  <p:cSld>
+    <p:spTree>
+      <p:nvGrpSpPr>
+        <p:cNvPr id="1" name=""/>
+        <p:cNvGrpSpPr/>
+        <p:nvPr/>
+      </p:nvGrpSpPr>
+      <p:grpSpPr/>
+      <p:sp>
+        <p:nvSpPr>
+          <p:cNvPr id="2" name="TextBox 1"/>
           <p:cNvSpPr txBox="1"/>
           <p:nvPr/>
         </p:nvSpPr>
         <p:spPr>
           <a:xfrm>
-            <a:off x="731520" y="1371600"/>
-            <a:ext cx="10698480" cy="5029200"/>
+            <a:off x="731520" y="365760"/>
+            <a:ext cx="10728655" cy="822960"/>
           </a:xfrm>
           <a:prstGeom prst="rect">
             <a:avLst/>
@@ -4728,89 +7717,205 @@
           <a:noFill/>
         </p:spPr>
         <p:txBody>
-          <a:bodyPr wrap="square">
+          <a:bodyPr wrap="square" lIns="0" tIns="0" rIns="0" bIns="0">
             <a:spAutoFit/>
           </a:bodyPr>
           <a:lstStyle/>
           <a:p>
-            <a:pPr>
-              <a:spcBef>
-                <a:spcPts val="1000"/>
-              </a:spcBef>
-              <a:defRPr sz="1500" b="1">
+            <a:r>
+              <a:rPr b="1" sz="1000">
+                <a:solidFill>
+                  <a:srgbClr val="4F46E5"/>
+                </a:solidFill>
+              </a:rPr>
+              <a:t>FEATURE HUD • PROJECT-050</a:t>
+            </a:r>
+          </a:p>
+          <a:p>
+            <a:r>
+              <a:rPr b="1" sz="2000">
                 <a:solidFill>
                   <a:srgbClr val="0F172A"/>
                 </a:solidFill>
-              </a:defRPr>
-            </a:pPr>
-            <a:r>
-              <a:t>■ Project Accomplishments</a:t>
-            </a:r>
-          </a:p>
-          <a:p>
-            <a:pPr>
-              <a:defRPr sz="1300">
-                <a:solidFill>
-                  <a:srgbClr val="475569"/>
-                </a:solidFill>
-              </a:defRPr>
-            </a:pPr>
-            <a:r>
-              <a:t>Engineered a robust, end-to-end prototype validating the initial abstract with reproducible experiments.</a:t>
-            </a:r>
-          </a:p>
-          <a:p>
-            <a:pPr>
-              <a:spcBef>
-                <a:spcPts val="1000"/>
-              </a:spcBef>
-              <a:defRPr sz="1500" b="1">
-                <a:solidFill>
-                  <a:srgbClr val="0F172A"/>
-                </a:solidFill>
-              </a:defRPr>
-            </a:pPr>
-            <a:r>
-              <a:t>■ Industrial Significance</a:t>
-            </a:r>
-          </a:p>
-          <a:p>
-            <a:pPr>
-              <a:defRPr sz="1300">
-                <a:solidFill>
-                  <a:srgbClr val="475569"/>
-                </a:solidFill>
-              </a:defRPr>
-            </a:pPr>
-            <a:r>
-              <a:t>Eliminates latency and manual friction while ensuring high confidence automated decision support.</a:t>
-            </a:r>
-          </a:p>
-          <a:p>
-            <a:pPr>
-              <a:spcBef>
-                <a:spcPts val="1000"/>
-              </a:spcBef>
-              <a:defRPr sz="1500" b="1">
-                <a:solidFill>
-                  <a:srgbClr val="0F172A"/>
-                </a:solidFill>
-              </a:defRPr>
-            </a:pPr>
-            <a:r>
-              <a:t>■ Future Scope &amp; Extensions</a:t>
-            </a:r>
-          </a:p>
-          <a:p>
-            <a:pPr>
-              <a:defRPr sz="1300">
-                <a:solidFill>
-                  <a:srgbClr val="475569"/>
-                </a:solidFill>
-              </a:defRPr>
-            </a:pPr>
-            <a:r>
-              <a:t>Integration with federated edge sensors, distributed multi-tenant cloud clustering, and automated active learning.</a:t>
+              </a:rPr>
+              <a:t>Handwriting &amp; Pen Stroke Degradation Chart HUD</a:t>
+            </a:r>
+          </a:p>
+        </p:txBody>
+      </p:sp>
+      <p:pic>
+        <p:nvPicPr>
+          <p:cNvPr id="3" name="Picture 2" descr="03_handwriting_degradation_chart.png"/>
+          <p:cNvPicPr>
+            <a:picLocks noChangeAspect="1"/>
+          </p:cNvPicPr>
+          <p:nvPr/>
+        </p:nvPicPr>
+        <p:blipFill>
+          <a:blip r:embed="rId2"/>
+          <a:stretch>
+            <a:fillRect/>
+          </a:stretch>
+        </p:blipFill>
+        <p:spPr>
+          <a:xfrm>
+            <a:off x="731520" y="1371600"/>
+            <a:ext cx="6858000" cy="4846320"/>
+          </a:xfrm>
+          <a:prstGeom prst="rect">
+            <a:avLst/>
+          </a:prstGeom>
+        </p:spPr>
+      </p:pic>
+      <p:sp>
+        <p:nvSpPr>
+          <p:cNvPr id="4" name="Rectangle 3"/>
+          <p:cNvSpPr/>
+          <p:nvPr/>
+        </p:nvSpPr>
+        <p:spPr>
+          <a:xfrm>
+            <a:off x="7863840" y="1371600"/>
+            <a:ext cx="3566160" cy="4846320"/>
+          </a:xfrm>
+          <a:prstGeom prst="rect">
+            <a:avLst/>
+          </a:prstGeom>
+          <a:solidFill>
+            <a:srgbClr val="FFFFFF"/>
+          </a:solidFill>
+          <a:ln w="12700">
+            <a:solidFill>
+              <a:srgbClr val="E2E8F0"/>
+            </a:solidFill>
+          </a:ln>
+        </p:spPr>
+        <p:style>
+          <a:lnRef idx="1">
+            <a:schemeClr val="accent1"/>
+          </a:lnRef>
+          <a:fillRef idx="3">
+            <a:schemeClr val="accent1"/>
+          </a:fillRef>
+          <a:effectRef idx="2">
+            <a:schemeClr val="accent1"/>
+          </a:effectRef>
+          <a:fontRef idx="minor">
+            <a:schemeClr val="lt1"/>
+          </a:fontRef>
+        </p:style>
+        <p:txBody>
+          <a:bodyPr rtlCol="0" anchor="ctr"/>
+          <a:lstStyle/>
+          <a:p>
+            <a:pPr algn="ctr"/>
+          </a:p>
+        </p:txBody>
+      </p:sp>
+      <p:sp>
+        <p:nvSpPr>
+          <p:cNvPr id="5" name="TextBox 4"/>
+          <p:cNvSpPr txBox="1"/>
+          <p:nvPr/>
+        </p:nvSpPr>
+        <p:spPr>
+          <a:xfrm>
+            <a:off x="8046720" y="1554480"/>
+            <a:ext cx="3200400" cy="4480560"/>
+          </a:xfrm>
+          <a:prstGeom prst="rect">
+            <a:avLst/>
+          </a:prstGeom>
+          <a:noFill/>
+        </p:spPr>
+        <p:txBody>
+          <a:bodyPr wrap="square" lIns="0" tIns="0" rIns="0" bIns="0">
+            <a:spAutoFit/>
+          </a:bodyPr>
+          <a:lstStyle/>
+          <a:p>
+            <a:r>
+              <a:rPr b="1" sz="1300">
+                <a:solidFill>
+                  <a:srgbClr val="4F46E5"/>
+                </a:solidFill>
+              </a:rPr>
+              <a:t>Optical Feature Radar</a:t>
+            </a:r>
+          </a:p>
+          <a:p>
+            <a:pPr>
+              <a:spcBef>
+                <a:spcPts val="400"/>
+              </a:spcBef>
+            </a:pPr>
+            <a:r>
+              <a:rPr sz="1000">
+                <a:solidFill>
+                  <a:srgbClr val="1E293B"/>
+                </a:solidFill>
+              </a:rPr>
+              <a:t>• Visualizes 6 key degradation dimensions in Chart.js canvas.</a:t>
+            </a:r>
+          </a:p>
+          <a:p>
+            <a:pPr>
+              <a:spcBef>
+                <a:spcPts val="400"/>
+              </a:spcBef>
+            </a:pPr>
+            <a:r>
+              <a:rPr sz="1000">
+                <a:solidFill>
+                  <a:srgbClr val="1E293B"/>
+                </a:solidFill>
+              </a:rPr>
+              <a:t>• Contrast ratio (88%) and Background SNR (31 dB).</a:t>
+            </a:r>
+          </a:p>
+          <a:p>
+            <a:pPr>
+              <a:spcBef>
+                <a:spcPts val="400"/>
+              </a:spcBef>
+            </a:pPr>
+            <a:r>
+              <a:rPr sz="1000">
+                <a:solidFill>
+                  <a:srgbClr val="1E293B"/>
+                </a:solidFill>
+              </a:rPr>
+              <a:t>• Pen stroke variance (10%) and Ink density (82%).</a:t>
+            </a:r>
+          </a:p>
+          <a:p>
+            <a:pPr>
+              <a:spcBef>
+                <a:spcPts val="400"/>
+              </a:spcBef>
+            </a:pPr>
+            <a:r>
+              <a:rPr sz="1000">
+                <a:solidFill>
+                  <a:srgbClr val="1E293B"/>
+                </a:solidFill>
+              </a:rPr>
+              <a:t>• Baseline slant angle (4°) and Signature stroke coverage (86%).</a:t>
+            </a:r>
+          </a:p>
+          <a:p>
+            <a:pPr>
+              <a:spcBef>
+                <a:spcPts val="400"/>
+              </a:spcBef>
+            </a:pPr>
+            <a:r>
+              <a:rPr sz="1000">
+                <a:solidFill>
+                  <a:srgbClr val="1E293B"/>
+                </a:solidFill>
+              </a:rPr>
+              <a:t>• Live updates as different document presets are evaluated.</a:t>
             </a:r>
           </a:p>
         </p:txBody>
